--- a/docs/Trazo-Presentacion.pptx
+++ b/docs/Trazo-Presentacion.pptx
@@ -2374,7 +2374,7 @@
                 <a:ea typeface="Calibri" pitchFamily="34" charset="-122"/>
                 <a:cs typeface="Calibri" pitchFamily="34" charset="-120"/>
               </a:rPr>
-              <a:t>~50% más barato que el plan pro de NeuronUP y sin límite por profesional.</a:t>
+              <a:t>Alrededor de la mitad de precio que las plataformas del sector, y sin límite por profesional.</a:t>
             </a:r>
             <a:endParaRPr lang="en-US" sz="1400" dirty="0"/>
           </a:p>
@@ -4169,7 +4169,7 @@
                 <a:ea typeface="Calibri" pitchFamily="34" charset="-122"/>
                 <a:cs typeface="Calibri" pitchFamily="34" charset="-120"/>
               </a:rPr>
-              <a:t>Las plataformas tradicionales (NeuronUP) cobran licencias caras, se usen o no, y siguen exigiendo montar todo a mano.</a:t>
+              <a:t>Las plataformas tradicionales cobran licencias caras, se usen o no, y siguen exigiendo montar todo a mano.</a:t>
             </a:r>
             <a:endParaRPr lang="en-US" sz="1350" dirty="0"/>
           </a:p>

--- a/docs/Trazo-Presentacion.pptx
+++ b/docs/Trazo-Presentacion.pptx
@@ -3802,7 +3802,7 @@
                 <a:ea typeface="Bookman Old Style" pitchFamily="34" charset="-122"/>
                 <a:cs typeface="Bookman Old Style" pitchFamily="34" charset="-120"/>
               </a:rPr>
-              <a:t>Montar la estimulación cognitiva</a:t>
+              <a:t>Trazo no sustituye vuestro trabajo:</a:t>
             </a:r>
             <a:endParaRPr lang="en-US" sz="3300" dirty="0"/>
           </a:p>
@@ -3822,7 +3822,7 @@
                 <a:ea typeface="Bookman Old Style" pitchFamily="34" charset="-122"/>
                 <a:cs typeface="Bookman Old Style" pitchFamily="34" charset="-120"/>
               </a:rPr>
-              <a:t>quita tiempo — y deja poca señal</a:t>
+              <a:t>lo hace más fácil y a distancia</a:t>
             </a:r>
             <a:endParaRPr lang="en-US" sz="3300" dirty="0"/>
           </a:p>
@@ -3888,7 +3888,7 @@
                 <a:ea typeface="Calibri" pitchFamily="34" charset="-122"/>
                 <a:cs typeface="Calibri" pitchFamily="34" charset="-120"/>
               </a:rPr>
-              <a:t>Hoy</a:t>
+              <a:t>El equipo ya</a:t>
             </a:r>
             <a:endParaRPr lang="en-US" sz="1300" dirty="0"/>
           </a:p>
@@ -3934,7 +3934,7 @@
                 <a:ea typeface="Calibri" pitchFamily="34" charset="-122"/>
                 <a:cs typeface="Calibri" pitchFamily="34" charset="-120"/>
               </a:rPr>
-              <a:t>Se monta la sesión ejercicio a ejercicio.</a:t>
+              <a:t>Planifica y acompaña cada sesión.</a:t>
             </a:r>
             <a:endParaRPr lang="en-US" sz="1650" dirty="0"/>
           </a:p>
@@ -3958,7 +3958,7 @@
                 <a:ea typeface="Calibri" pitchFamily="34" charset="-122"/>
                 <a:cs typeface="Calibri" pitchFamily="34" charset="-120"/>
               </a:rPr>
-              <a:t>Sobre papel, la evolución no se ve.</a:t>
+              <a:t>Sigue a mano la evolución de cada persona.</a:t>
             </a:r>
             <a:endParaRPr lang="en-US" sz="1650" dirty="0"/>
           </a:p>
@@ -3982,7 +3982,7 @@
                 <a:ea typeface="Calibri" pitchFamily="34" charset="-122"/>
                 <a:cs typeface="Calibri" pitchFamily="34" charset="-120"/>
               </a:rPr>
-              <a:t>Las plataformas del sector son caras y poco ágiles.</a:t>
+              <a:t>Se coordina para planificar las actividades.</a:t>
             </a:r>
             <a:endParaRPr lang="en-US" sz="1650" dirty="0"/>
           </a:p>
@@ -4068,7 +4068,7 @@
                 <a:ea typeface="Calibri" pitchFamily="34" charset="-122"/>
                 <a:cs typeface="Calibri" pitchFamily="34" charset="-120"/>
               </a:rPr>
-              <a:t>Con Trazo</a:t>
+              <a:t>Trazo suma</a:t>
             </a:r>
             <a:endParaRPr lang="en-US" sz="1300" dirty="0"/>
           </a:p>
@@ -4162,7 +4162,7 @@
                 <a:ea typeface="Calibri" pitchFamily="34" charset="-122"/>
                 <a:cs typeface="Calibri" pitchFamily="34" charset="-120"/>
               </a:rPr>
-              <a:t>Compara a cada persona consigo misma y avisa de cambios.</a:t>
+              <a:t>Ve el cambio a distancia y avisa; y es digitalización útil.</a:t>
             </a:r>
             <a:endParaRPr lang="en-US" sz="1650" dirty="0"/>
           </a:p>

--- a/docs/Trazo-Presentacion.pptx
+++ b/docs/Trazo-Presentacion.pptx
@@ -1786,6 +1786,10 @@
           </a:solidFill>
           <a:ln/>
         </p:spPr>
+        <p:txBody>
+          <a:bodyPr/>
+          <a:p/>
+        </p:txBody>
       </p:sp>
       <p:sp>
         <p:nvSpPr>
@@ -1809,6 +1813,10 @@
             <a:prstDash val="solid"/>
           </a:ln>
         </p:spPr>
+        <p:txBody>
+          <a:bodyPr/>
+          <a:p/>
+        </p:txBody>
       </p:sp>
       <p:sp>
         <p:nvSpPr>
@@ -1832,6 +1840,10 @@
             <a:prstDash val="solid"/>
           </a:ln>
         </p:spPr>
+        <p:txBody>
+          <a:bodyPr/>
+          <a:p/>
+        </p:txBody>
       </p:sp>
       <p:sp>
         <p:nvSpPr>
@@ -1855,6 +1867,10 @@
             <a:prstDash val="solid"/>
           </a:ln>
         </p:spPr>
+        <p:txBody>
+          <a:bodyPr/>
+          <a:p/>
+        </p:txBody>
       </p:sp>
       <p:sp>
         <p:nvSpPr>
@@ -1878,6 +1894,10 @@
             <a:prstDash val="solid"/>
           </a:ln>
         </p:spPr>
+        <p:txBody>
+          <a:bodyPr/>
+          <a:p/>
+        </p:txBody>
       </p:sp>
       <p:sp>
         <p:nvSpPr>
@@ -1901,6 +1921,10 @@
             <a:prstDash val="solid"/>
           </a:ln>
         </p:spPr>
+        <p:txBody>
+          <a:bodyPr/>
+          <a:p/>
+        </p:txBody>
       </p:sp>
       <p:sp>
         <p:nvSpPr>
@@ -1924,6 +1948,10 @@
             <a:prstDash val="solid"/>
           </a:ln>
         </p:spPr>
+        <p:txBody>
+          <a:bodyPr/>
+          <a:p/>
+        </p:txBody>
       </p:sp>
       <p:sp>
         <p:nvSpPr>
@@ -1944,6 +1972,10 @@
           </a:solidFill>
           <a:ln/>
         </p:spPr>
+        <p:txBody>
+          <a:bodyPr/>
+          <a:p/>
+        </p:txBody>
       </p:sp>
       <p:sp>
         <p:nvSpPr>
@@ -2173,6 +2205,10 @@
             <a:prstDash val="solid"/>
           </a:ln>
         </p:spPr>
+        <p:txBody>
+          <a:bodyPr/>
+          <a:p/>
+        </p:txBody>
       </p:sp>
       <p:sp>
         <p:nvSpPr>
@@ -2239,6 +2275,10 @@
             <a:prstDash val="solid"/>
           </a:ln>
         </p:spPr>
+        <p:txBody>
+          <a:bodyPr/>
+          <a:p/>
+        </p:txBody>
       </p:sp>
       <p:sp>
         <p:nvSpPr>
@@ -2305,6 +2345,10 @@
             <a:prstDash val="solid"/>
           </a:ln>
         </p:spPr>
+        <p:txBody>
+          <a:bodyPr/>
+          <a:p/>
+        </p:txBody>
       </p:sp>
       <p:sp>
         <p:nvSpPr>
@@ -2520,6 +2564,10 @@
             <a:prstDash val="solid"/>
           </a:ln>
         </p:spPr>
+        <p:txBody>
+          <a:bodyPr/>
+          <a:p/>
+        </p:txBody>
       </p:sp>
       <p:sp>
         <p:nvSpPr>
@@ -2765,6 +2813,10 @@
             </a:outerShdw>
           </a:effectLst>
         </p:spPr>
+        <p:txBody>
+          <a:bodyPr/>
+          <a:p/>
+        </p:txBody>
       </p:sp>
       <p:sp>
         <p:nvSpPr>
@@ -2787,6 +2839,10 @@
           </a:solidFill>
           <a:ln/>
         </p:spPr>
+        <p:txBody>
+          <a:bodyPr/>
+          <a:p/>
+        </p:txBody>
       </p:sp>
       <p:sp>
         <p:nvSpPr>
@@ -3088,6 +3144,10 @@
             <a:prstDash val="solid"/>
           </a:ln>
         </p:spPr>
+        <p:txBody>
+          <a:bodyPr/>
+          <a:p/>
+        </p:txBody>
       </p:sp>
       <p:sp>
         <p:nvSpPr>
@@ -3353,6 +3413,10 @@
           </a:solidFill>
           <a:ln/>
         </p:spPr>
+        <p:txBody>
+          <a:bodyPr/>
+          <a:p/>
+        </p:txBody>
       </p:sp>
       <p:sp>
         <p:nvSpPr>
@@ -3376,6 +3440,10 @@
             <a:prstDash val="solid"/>
           </a:ln>
         </p:spPr>
+        <p:txBody>
+          <a:bodyPr/>
+          <a:p/>
+        </p:txBody>
       </p:sp>
       <p:sp>
         <p:nvSpPr>
@@ -3399,6 +3467,10 @@
             <a:prstDash val="solid"/>
           </a:ln>
         </p:spPr>
+        <p:txBody>
+          <a:bodyPr/>
+          <a:p/>
+        </p:txBody>
       </p:sp>
       <p:sp>
         <p:nvSpPr>
@@ -3422,6 +3494,10 @@
             <a:prstDash val="solid"/>
           </a:ln>
         </p:spPr>
+        <p:txBody>
+          <a:bodyPr/>
+          <a:p/>
+        </p:txBody>
       </p:sp>
       <p:sp>
         <p:nvSpPr>
@@ -3445,6 +3521,10 @@
             <a:prstDash val="solid"/>
           </a:ln>
         </p:spPr>
+        <p:txBody>
+          <a:bodyPr/>
+          <a:p/>
+        </p:txBody>
       </p:sp>
       <p:sp>
         <p:nvSpPr>
@@ -3468,6 +3548,10 @@
             <a:prstDash val="solid"/>
           </a:ln>
         </p:spPr>
+        <p:txBody>
+          <a:bodyPr/>
+          <a:p/>
+        </p:txBody>
       </p:sp>
       <p:sp>
         <p:nvSpPr>
@@ -3491,6 +3575,10 @@
             <a:prstDash val="solid"/>
           </a:ln>
         </p:spPr>
+        <p:txBody>
+          <a:bodyPr/>
+          <a:p/>
+        </p:txBody>
       </p:sp>
       <p:sp>
         <p:nvSpPr>
@@ -3511,6 +3599,10 @@
           </a:solidFill>
           <a:ln/>
         </p:spPr>
+        <p:txBody>
+          <a:bodyPr/>
+          <a:p/>
+        </p:txBody>
       </p:sp>
       <p:sp>
         <p:nvSpPr>
@@ -3616,6 +3708,10 @@
             <a:prstDash val="solid"/>
           </a:ln>
         </p:spPr>
+        <p:txBody>
+          <a:bodyPr/>
+          <a:p/>
+        </p:txBody>
       </p:sp>
       <p:sp>
         <p:nvSpPr>
@@ -3854,6 +3950,10 @@
             <a:prstDash val="solid"/>
           </a:ln>
         </p:spPr>
+        <p:txBody>
+          <a:bodyPr/>
+          <a:p/>
+        </p:txBody>
       </p:sp>
       <p:sp>
         <p:nvSpPr>
@@ -4007,6 +4107,10 @@
           </a:solidFill>
           <a:ln/>
         </p:spPr>
+        <p:txBody>
+          <a:bodyPr/>
+          <a:p/>
+        </p:txBody>
       </p:sp>
       <p:sp>
         <p:nvSpPr>
@@ -4034,6 +4138,10 @@
             <a:prstDash val="solid"/>
           </a:ln>
         </p:spPr>
+        <p:txBody>
+          <a:bodyPr/>
+          <a:p/>
+        </p:txBody>
       </p:sp>
       <p:sp>
         <p:nvSpPr>
@@ -4306,6 +4414,10 @@
             </a:outerShdw>
           </a:effectLst>
         </p:spPr>
+        <p:txBody>
+          <a:bodyPr/>
+          <a:p/>
+        </p:txBody>
       </p:sp>
       <p:sp>
         <p:nvSpPr>
@@ -4328,6 +4440,10 @@
           </a:solidFill>
           <a:ln/>
         </p:spPr>
+        <p:txBody>
+          <a:bodyPr/>
+          <a:p/>
+        </p:txBody>
       </p:sp>
       <p:sp>
         <p:nvSpPr>
@@ -4394,6 +4510,10 @@
             <a:prstDash val="solid"/>
           </a:ln>
         </p:spPr>
+        <p:txBody>
+          <a:bodyPr/>
+          <a:p/>
+        </p:txBody>
       </p:sp>
       <p:sp>
         <p:nvSpPr>
@@ -4460,6 +4580,10 @@
             <a:prstDash val="solid"/>
           </a:ln>
         </p:spPr>
+        <p:txBody>
+          <a:bodyPr/>
+          <a:p/>
+        </p:txBody>
       </p:sp>
       <p:sp>
         <p:nvSpPr>
@@ -4526,6 +4650,10 @@
             <a:prstDash val="solid"/>
           </a:ln>
         </p:spPr>
+        <p:txBody>
+          <a:bodyPr/>
+          <a:p/>
+        </p:txBody>
       </p:sp>
       <p:sp>
         <p:nvSpPr>
@@ -4592,6 +4720,10 @@
             <a:prstDash val="solid"/>
           </a:ln>
         </p:spPr>
+        <p:txBody>
+          <a:bodyPr/>
+          <a:p/>
+        </p:txBody>
       </p:sp>
       <p:sp>
         <p:nvSpPr>
@@ -4653,6 +4785,10 @@
           </a:solidFill>
           <a:ln/>
         </p:spPr>
+        <p:txBody>
+          <a:bodyPr/>
+          <a:p/>
+        </p:txBody>
       </p:sp>
       <p:sp>
         <p:nvSpPr>
@@ -4717,6 +4853,10 @@
             <a:prstDash val="solid"/>
           </a:ln>
         </p:spPr>
+        <p:txBody>
+          <a:bodyPr/>
+          <a:p/>
+        </p:txBody>
       </p:sp>
       <p:sp>
         <p:nvSpPr>
@@ -4857,6 +4997,10 @@
           </a:solidFill>
           <a:ln/>
         </p:spPr>
+        <p:txBody>
+          <a:bodyPr/>
+          <a:p/>
+        </p:txBody>
       </p:sp>
       <p:sp>
         <p:nvSpPr>
@@ -4886,6 +5030,10 @@
             </a:outerShdw>
           </a:effectLst>
         </p:spPr>
+        <p:txBody>
+          <a:bodyPr/>
+          <a:p/>
+        </p:txBody>
       </p:sp>
       <p:sp>
         <p:nvSpPr>
@@ -4908,6 +5056,10 @@
           </a:solidFill>
           <a:ln/>
         </p:spPr>
+        <p:txBody>
+          <a:bodyPr/>
+          <a:p/>
+        </p:txBody>
       </p:sp>
       <p:sp>
         <p:nvSpPr>
@@ -4930,6 +5082,10 @@
           </a:solidFill>
           <a:ln/>
         </p:spPr>
+        <p:txBody>
+          <a:bodyPr/>
+          <a:p/>
+        </p:txBody>
       </p:sp>
       <p:sp>
         <p:nvSpPr>
@@ -4996,6 +5152,10 @@
             <a:prstDash val="solid"/>
           </a:ln>
         </p:spPr>
+        <p:txBody>
+          <a:bodyPr/>
+          <a:p/>
+        </p:txBody>
       </p:sp>
       <p:sp>
         <p:nvSpPr>
@@ -5060,6 +5220,10 @@
             <a:prstDash val="solid"/>
           </a:ln>
         </p:spPr>
+        <p:txBody>
+          <a:bodyPr/>
+          <a:p/>
+        </p:txBody>
       </p:sp>
       <p:sp>
         <p:nvSpPr>
@@ -5200,6 +5364,10 @@
           </a:solidFill>
           <a:ln/>
         </p:spPr>
+        <p:txBody>
+          <a:bodyPr/>
+          <a:p/>
+        </p:txBody>
       </p:sp>
       <p:sp>
         <p:nvSpPr>
@@ -5229,6 +5397,10 @@
             </a:outerShdw>
           </a:effectLst>
         </p:spPr>
+        <p:txBody>
+          <a:bodyPr/>
+          <a:p/>
+        </p:txBody>
       </p:sp>
       <p:sp>
         <p:nvSpPr>
@@ -5251,6 +5423,10 @@
           </a:solidFill>
           <a:ln/>
         </p:spPr>
+        <p:txBody>
+          <a:bodyPr/>
+          <a:p/>
+        </p:txBody>
       </p:sp>
       <p:sp>
         <p:nvSpPr>
@@ -5274,6 +5450,10 @@
             <a:prstDash val="dash"/>
           </a:ln>
         </p:spPr>
+        <p:txBody>
+          <a:bodyPr/>
+          <a:p/>
+        </p:txBody>
       </p:sp>
       <p:sp>
         <p:nvSpPr>
@@ -5297,6 +5477,10 @@
             <a:prstDash val="dash"/>
           </a:ln>
         </p:spPr>
+        <p:txBody>
+          <a:bodyPr/>
+          <a:p/>
+        </p:txBody>
       </p:sp>
       <p:sp>
         <p:nvSpPr>
@@ -5320,6 +5504,10 @@
             <a:prstDash val="dash"/>
           </a:ln>
         </p:spPr>
+        <p:txBody>
+          <a:bodyPr/>
+          <a:p/>
+        </p:txBody>
       </p:sp>
       <p:sp>
         <p:nvSpPr>
@@ -5343,6 +5531,10 @@
             <a:prstDash val="dash"/>
           </a:ln>
         </p:spPr>
+        <p:txBody>
+          <a:bodyPr/>
+          <a:p/>
+        </p:txBody>
       </p:sp>
       <p:sp>
         <p:nvSpPr>
@@ -5366,6 +5558,10 @@
             <a:prstDash val="dash"/>
           </a:ln>
         </p:spPr>
+        <p:txBody>
+          <a:bodyPr/>
+          <a:p/>
+        </p:txBody>
       </p:sp>
       <p:sp>
         <p:nvSpPr>
@@ -5389,6 +5585,10 @@
             <a:prstDash val="dash"/>
           </a:ln>
         </p:spPr>
+        <p:txBody>
+          <a:bodyPr/>
+          <a:p/>
+        </p:txBody>
       </p:sp>
       <p:sp>
         <p:nvSpPr>
@@ -5412,6 +5612,10 @@
             <a:prstDash val="dash"/>
           </a:ln>
         </p:spPr>
+        <p:txBody>
+          <a:bodyPr/>
+          <a:p/>
+        </p:txBody>
       </p:sp>
       <p:sp>
         <p:nvSpPr>
@@ -5435,6 +5639,10 @@
             <a:prstDash val="dash"/>
           </a:ln>
         </p:spPr>
+        <p:txBody>
+          <a:bodyPr/>
+          <a:p/>
+        </p:txBody>
       </p:sp>
       <p:sp>
         <p:nvSpPr>
@@ -5458,6 +5666,10 @@
             <a:prstDash val="dash"/>
           </a:ln>
         </p:spPr>
+        <p:txBody>
+          <a:bodyPr/>
+          <a:p/>
+        </p:txBody>
       </p:sp>
       <p:sp>
         <p:nvSpPr>
@@ -5481,6 +5693,10 @@
             <a:prstDash val="dash"/>
           </a:ln>
         </p:spPr>
+        <p:txBody>
+          <a:bodyPr/>
+          <a:p/>
+        </p:txBody>
       </p:sp>
       <p:sp>
         <p:nvSpPr>
@@ -5504,6 +5720,10 @@
             <a:prstDash val="dash"/>
           </a:ln>
         </p:spPr>
+        <p:txBody>
+          <a:bodyPr/>
+          <a:p/>
+        </p:txBody>
       </p:sp>
       <p:sp>
         <p:nvSpPr>
@@ -5527,6 +5747,10 @@
             <a:prstDash val="dash"/>
           </a:ln>
         </p:spPr>
+        <p:txBody>
+          <a:bodyPr/>
+          <a:p/>
+        </p:txBody>
       </p:sp>
       <p:sp>
         <p:nvSpPr>
@@ -5550,6 +5774,10 @@
             <a:prstDash val="dash"/>
           </a:ln>
         </p:spPr>
+        <p:txBody>
+          <a:bodyPr/>
+          <a:p/>
+        </p:txBody>
       </p:sp>
       <p:sp>
         <p:nvSpPr>
@@ -5573,6 +5801,10 @@
             <a:prstDash val="dash"/>
           </a:ln>
         </p:spPr>
+        <p:txBody>
+          <a:bodyPr/>
+          <a:p/>
+        </p:txBody>
       </p:sp>
       <p:sp>
         <p:nvSpPr>
@@ -5596,6 +5828,10 @@
             <a:prstDash val="dash"/>
           </a:ln>
         </p:spPr>
+        <p:txBody>
+          <a:bodyPr/>
+          <a:p/>
+        </p:txBody>
       </p:sp>
       <p:sp>
         <p:nvSpPr>
@@ -5619,6 +5855,10 @@
             <a:prstDash val="dash"/>
           </a:ln>
         </p:spPr>
+        <p:txBody>
+          <a:bodyPr/>
+          <a:p/>
+        </p:txBody>
       </p:sp>
       <p:sp>
         <p:nvSpPr>
@@ -5642,6 +5882,10 @@
             <a:prstDash val="dash"/>
           </a:ln>
         </p:spPr>
+        <p:txBody>
+          <a:bodyPr/>
+          <a:p/>
+        </p:txBody>
       </p:sp>
       <p:sp>
         <p:nvSpPr>
@@ -5665,6 +5909,10 @@
             <a:prstDash val="dash"/>
           </a:ln>
         </p:spPr>
+        <p:txBody>
+          <a:bodyPr/>
+          <a:p/>
+        </p:txBody>
       </p:sp>
       <p:sp>
         <p:nvSpPr>
@@ -5688,6 +5936,10 @@
             <a:prstDash val="dash"/>
           </a:ln>
         </p:spPr>
+        <p:txBody>
+          <a:bodyPr/>
+          <a:p/>
+        </p:txBody>
       </p:sp>
       <p:sp>
         <p:nvSpPr>
@@ -5711,6 +5963,10 @@
             <a:prstDash val="dash"/>
           </a:ln>
         </p:spPr>
+        <p:txBody>
+          <a:bodyPr/>
+          <a:p/>
+        </p:txBody>
       </p:sp>
       <p:sp>
         <p:nvSpPr>
@@ -5734,6 +5990,10 @@
             <a:prstDash val="dash"/>
           </a:ln>
         </p:spPr>
+        <p:txBody>
+          <a:bodyPr/>
+          <a:p/>
+        </p:txBody>
       </p:sp>
       <p:sp>
         <p:nvSpPr>
@@ -5757,6 +6017,10 @@
             <a:prstDash val="dash"/>
           </a:ln>
         </p:spPr>
+        <p:txBody>
+          <a:bodyPr/>
+          <a:p/>
+        </p:txBody>
       </p:sp>
       <p:sp>
         <p:nvSpPr>
@@ -5780,6 +6044,10 @@
             <a:prstDash val="dash"/>
           </a:ln>
         </p:spPr>
+        <p:txBody>
+          <a:bodyPr/>
+          <a:p/>
+        </p:txBody>
       </p:sp>
       <p:sp>
         <p:nvSpPr>
@@ -5803,6 +6071,10 @@
             <a:prstDash val="dash"/>
           </a:ln>
         </p:spPr>
+        <p:txBody>
+          <a:bodyPr/>
+          <a:p/>
+        </p:txBody>
       </p:sp>
       <p:sp>
         <p:nvSpPr>
@@ -5826,6 +6098,10 @@
             <a:prstDash val="dash"/>
           </a:ln>
         </p:spPr>
+        <p:txBody>
+          <a:bodyPr/>
+          <a:p/>
+        </p:txBody>
       </p:sp>
       <p:sp>
         <p:nvSpPr>
@@ -5849,6 +6125,10 @@
             <a:prstDash val="dash"/>
           </a:ln>
         </p:spPr>
+        <p:txBody>
+          <a:bodyPr/>
+          <a:p/>
+        </p:txBody>
       </p:sp>
       <p:sp>
         <p:nvSpPr>
@@ -5872,6 +6152,10 @@
             <a:prstDash val="solid"/>
           </a:ln>
         </p:spPr>
+        <p:txBody>
+          <a:bodyPr/>
+          <a:p/>
+        </p:txBody>
       </p:sp>
       <p:sp>
         <p:nvSpPr>
@@ -5895,6 +6179,10 @@
             <a:prstDash val="solid"/>
           </a:ln>
         </p:spPr>
+        <p:txBody>
+          <a:bodyPr/>
+          <a:p/>
+        </p:txBody>
       </p:sp>
       <p:sp>
         <p:nvSpPr>
@@ -5918,6 +6206,10 @@
             <a:prstDash val="solid"/>
           </a:ln>
         </p:spPr>
+        <p:txBody>
+          <a:bodyPr/>
+          <a:p/>
+        </p:txBody>
       </p:sp>
       <p:sp>
         <p:nvSpPr>
@@ -5941,6 +6233,10 @@
             <a:prstDash val="solid"/>
           </a:ln>
         </p:spPr>
+        <p:txBody>
+          <a:bodyPr/>
+          <a:p/>
+        </p:txBody>
       </p:sp>
       <p:sp>
         <p:nvSpPr>
@@ -5964,6 +6260,10 @@
             <a:prstDash val="solid"/>
           </a:ln>
         </p:spPr>
+        <p:txBody>
+          <a:bodyPr/>
+          <a:p/>
+        </p:txBody>
       </p:sp>
       <p:sp>
         <p:nvSpPr>
@@ -5987,6 +6287,10 @@
             <a:prstDash val="solid"/>
           </a:ln>
         </p:spPr>
+        <p:txBody>
+          <a:bodyPr/>
+          <a:p/>
+        </p:txBody>
       </p:sp>
       <p:sp>
         <p:nvSpPr>
@@ -6010,6 +6314,10 @@
             <a:prstDash val="solid"/>
           </a:ln>
         </p:spPr>
+        <p:txBody>
+          <a:bodyPr/>
+          <a:p/>
+        </p:txBody>
       </p:sp>
       <p:sp>
         <p:nvSpPr>
@@ -6033,6 +6341,10 @@
             <a:prstDash val="solid"/>
           </a:ln>
         </p:spPr>
+        <p:txBody>
+          <a:bodyPr/>
+          <a:p/>
+        </p:txBody>
       </p:sp>
       <p:sp>
         <p:nvSpPr>
@@ -6056,6 +6368,10 @@
             <a:prstDash val="solid"/>
           </a:ln>
         </p:spPr>
+        <p:txBody>
+          <a:bodyPr/>
+          <a:p/>
+        </p:txBody>
       </p:sp>
       <p:sp>
         <p:nvSpPr>
@@ -6079,6 +6395,10 @@
             <a:prstDash val="solid"/>
           </a:ln>
         </p:spPr>
+        <p:txBody>
+          <a:bodyPr/>
+          <a:p/>
+        </p:txBody>
       </p:sp>
       <p:sp>
         <p:nvSpPr>
@@ -6102,6 +6422,10 @@
             <a:prstDash val="solid"/>
           </a:ln>
         </p:spPr>
+        <p:txBody>
+          <a:bodyPr/>
+          <a:p/>
+        </p:txBody>
       </p:sp>
       <p:sp>
         <p:nvSpPr>
@@ -6125,6 +6449,10 @@
             <a:prstDash val="solid"/>
           </a:ln>
         </p:spPr>
+        <p:txBody>
+          <a:bodyPr/>
+          <a:p/>
+        </p:txBody>
       </p:sp>
       <p:sp>
         <p:nvSpPr>
@@ -6148,6 +6476,10 @@
             <a:prstDash val="solid"/>
           </a:ln>
         </p:spPr>
+        <p:txBody>
+          <a:bodyPr/>
+          <a:p/>
+        </p:txBody>
       </p:sp>
       <p:sp>
         <p:nvSpPr>
@@ -6171,6 +6503,10 @@
             <a:prstDash val="solid"/>
           </a:ln>
         </p:spPr>
+        <p:txBody>
+          <a:bodyPr/>
+          <a:p/>
+        </p:txBody>
       </p:sp>
       <p:sp>
         <p:nvSpPr>
@@ -6194,6 +6530,10 @@
             <a:prstDash val="solid"/>
           </a:ln>
         </p:spPr>
+        <p:txBody>
+          <a:bodyPr/>
+          <a:p/>
+        </p:txBody>
       </p:sp>
       <p:sp>
         <p:nvSpPr>
@@ -6217,6 +6557,10 @@
             <a:prstDash val="solid"/>
           </a:ln>
         </p:spPr>
+        <p:txBody>
+          <a:bodyPr/>
+          <a:p/>
+        </p:txBody>
       </p:sp>
       <p:sp>
         <p:nvSpPr>
@@ -6240,6 +6584,10 @@
             <a:prstDash val="solid"/>
           </a:ln>
         </p:spPr>
+        <p:txBody>
+          <a:bodyPr/>
+          <a:p/>
+        </p:txBody>
       </p:sp>
       <p:sp>
         <p:nvSpPr>
@@ -6263,6 +6611,10 @@
             <a:prstDash val="solid"/>
           </a:ln>
         </p:spPr>
+        <p:txBody>
+          <a:bodyPr/>
+          <a:p/>
+        </p:txBody>
       </p:sp>
       <p:sp>
         <p:nvSpPr>
@@ -6286,6 +6638,10 @@
             <a:prstDash val="solid"/>
           </a:ln>
         </p:spPr>
+        <p:txBody>
+          <a:bodyPr/>
+          <a:p/>
+        </p:txBody>
       </p:sp>
       <p:sp>
         <p:nvSpPr>
@@ -6309,6 +6665,10 @@
             <a:prstDash val="solid"/>
           </a:ln>
         </p:spPr>
+        <p:txBody>
+          <a:bodyPr/>
+          <a:p/>
+        </p:txBody>
       </p:sp>
       <p:sp>
         <p:nvSpPr>
@@ -6329,6 +6689,10 @@
           </a:solidFill>
           <a:ln/>
         </p:spPr>
+        <p:txBody>
+          <a:bodyPr/>
+          <a:p/>
+        </p:txBody>
       </p:sp>
       <p:sp>
         <p:nvSpPr>
@@ -6393,6 +6757,10 @@
             <a:prstDash val="solid"/>
           </a:ln>
         </p:spPr>
+        <p:txBody>
+          <a:bodyPr/>
+          <a:p/>
+        </p:txBody>
       </p:sp>
       <p:sp>
         <p:nvSpPr>
@@ -6533,6 +6901,10 @@
           </a:solidFill>
           <a:ln/>
         </p:spPr>
+        <p:txBody>
+          <a:bodyPr/>
+          <a:p/>
+        </p:txBody>
       </p:sp>
       <p:sp>
         <p:nvSpPr>
@@ -6562,6 +6934,10 @@
             </a:outerShdw>
           </a:effectLst>
         </p:spPr>
+        <p:txBody>
+          <a:bodyPr/>
+          <a:p/>
+        </p:txBody>
       </p:sp>
       <p:sp>
         <p:nvSpPr>
@@ -6584,6 +6960,10 @@
           </a:solidFill>
           <a:ln/>
         </p:spPr>
+        <p:txBody>
+          <a:bodyPr/>
+          <a:p/>
+        </p:txBody>
       </p:sp>
       <p:sp>
         <p:nvSpPr>
@@ -6606,6 +6986,10 @@
           </a:solidFill>
           <a:ln/>
         </p:spPr>
+        <p:txBody>
+          <a:bodyPr/>
+          <a:p/>
+        </p:txBody>
       </p:sp>
       <p:sp>
         <p:nvSpPr>
@@ -6628,6 +7012,10 @@
           </a:solidFill>
           <a:ln/>
         </p:spPr>
+        <p:txBody>
+          <a:bodyPr/>
+          <a:p/>
+        </p:txBody>
       </p:sp>
       <p:sp>
         <p:nvSpPr>
@@ -6650,6 +7038,10 @@
           </a:solidFill>
           <a:ln/>
         </p:spPr>
+        <p:txBody>
+          <a:bodyPr/>
+          <a:p/>
+        </p:txBody>
       </p:sp>
       <p:sp>
         <p:nvSpPr>
@@ -6672,6 +7064,10 @@
           </a:solidFill>
           <a:ln/>
         </p:spPr>
+        <p:txBody>
+          <a:bodyPr/>
+          <a:p/>
+        </p:txBody>
       </p:sp>
       <p:sp>
         <p:nvSpPr>
@@ -6692,6 +7088,10 @@
           </a:solidFill>
           <a:ln/>
         </p:spPr>
+        <p:txBody>
+          <a:bodyPr/>
+          <a:p/>
+        </p:txBody>
       </p:sp>
       <p:sp>
         <p:nvSpPr>
@@ -6795,6 +7195,10 @@
             <a:prstDash val="solid"/>
           </a:ln>
         </p:spPr>
+        <p:txBody>
+          <a:bodyPr/>
+          <a:p/>
+        </p:txBody>
       </p:sp>
       <p:sp>
         <p:nvSpPr>
@@ -6935,6 +7339,10 @@
           </a:solidFill>
           <a:ln/>
         </p:spPr>
+        <p:txBody>
+          <a:bodyPr/>
+          <a:p/>
+        </p:txBody>
       </p:sp>
       <p:sp>
         <p:nvSpPr>
@@ -6964,6 +7372,10 @@
             </a:outerShdw>
           </a:effectLst>
         </p:spPr>
+        <p:txBody>
+          <a:bodyPr/>
+          <a:p/>
+        </p:txBody>
       </p:sp>
       <p:sp>
         <p:nvSpPr>
@@ -6986,6 +7398,10 @@
           </a:solidFill>
           <a:ln/>
         </p:spPr>
+        <p:txBody>
+          <a:bodyPr/>
+          <a:p/>
+        </p:txBody>
       </p:sp>
       <p:sp>
         <p:nvSpPr>
@@ -7009,6 +7425,10 @@
             <a:prstDash val="solid"/>
           </a:ln>
         </p:spPr>
+        <p:txBody>
+          <a:bodyPr/>
+          <a:p/>
+        </p:txBody>
       </p:sp>
       <p:sp>
         <p:nvSpPr>
@@ -7032,6 +7452,10 @@
             <a:prstDash val="solid"/>
           </a:ln>
         </p:spPr>
+        <p:txBody>
+          <a:bodyPr/>
+          <a:p/>
+        </p:txBody>
       </p:sp>
       <p:sp>
         <p:nvSpPr>
@@ -7055,6 +7479,10 @@
             <a:prstDash val="solid"/>
           </a:ln>
         </p:spPr>
+        <p:txBody>
+          <a:bodyPr/>
+          <a:p/>
+        </p:txBody>
       </p:sp>
       <p:sp>
         <p:nvSpPr>
@@ -7078,6 +7506,10 @@
             <a:prstDash val="solid"/>
           </a:ln>
         </p:spPr>
+        <p:txBody>
+          <a:bodyPr/>
+          <a:p/>
+        </p:txBody>
       </p:sp>
       <p:sp>
         <p:nvSpPr>
@@ -7101,6 +7533,10 @@
             <a:prstDash val="solid"/>
           </a:ln>
         </p:spPr>
+        <p:txBody>
+          <a:bodyPr/>
+          <a:p/>
+        </p:txBody>
       </p:sp>
       <p:sp>
         <p:nvSpPr>
@@ -7128,6 +7564,10 @@
             <a:prstDash val="solid"/>
           </a:ln>
         </p:spPr>
+        <p:txBody>
+          <a:bodyPr/>
+          <a:p/>
+        </p:txBody>
       </p:sp>
       <p:sp>
         <p:nvSpPr>
@@ -7192,6 +7632,10 @@
             <a:prstDash val="solid"/>
           </a:ln>
         </p:spPr>
+        <p:txBody>
+          <a:bodyPr/>
+          <a:p/>
+        </p:txBody>
       </p:sp>
       <p:sp>
         <p:nvSpPr>
@@ -7451,6 +7895,10 @@
             </a:outerShdw>
           </a:effectLst>
         </p:spPr>
+        <p:txBody>
+          <a:bodyPr/>
+          <a:p/>
+        </p:txBody>
       </p:sp>
       <p:sp>
         <p:nvSpPr>
@@ -7473,6 +7921,10 @@
           </a:solidFill>
           <a:ln/>
         </p:spPr>
+        <p:txBody>
+          <a:bodyPr/>
+          <a:p/>
+        </p:txBody>
       </p:sp>
       <p:sp>
         <p:nvSpPr>
@@ -7495,6 +7947,10 @@
           </a:solidFill>
           <a:ln/>
         </p:spPr>
+        <p:txBody>
+          <a:bodyPr/>
+          <a:p/>
+        </p:txBody>
       </p:sp>
       <p:sp>
         <p:nvSpPr>
@@ -7518,6 +7974,10 @@
             <a:prstDash val="solid"/>
           </a:ln>
         </p:spPr>
+        <p:txBody>
+          <a:bodyPr/>
+          <a:p/>
+        </p:txBody>
       </p:sp>
       <p:sp>
         <p:nvSpPr>
@@ -7541,6 +8001,10 @@
             <a:prstDash val="solid"/>
           </a:ln>
         </p:spPr>
+        <p:txBody>
+          <a:bodyPr/>
+          <a:p/>
+        </p:txBody>
       </p:sp>
       <p:sp>
         <p:nvSpPr>
@@ -7564,6 +8028,10 @@
             <a:prstDash val="solid"/>
           </a:ln>
         </p:spPr>
+        <p:txBody>
+          <a:bodyPr/>
+          <a:p/>
+        </p:txBody>
       </p:sp>
       <p:sp>
         <p:nvSpPr>
@@ -7587,6 +8055,10 @@
             <a:prstDash val="solid"/>
           </a:ln>
         </p:spPr>
+        <p:txBody>
+          <a:bodyPr/>
+          <a:p/>
+        </p:txBody>
       </p:sp>
       <p:sp>
         <p:nvSpPr>
@@ -7610,6 +8082,10 @@
             <a:prstDash val="solid"/>
           </a:ln>
         </p:spPr>
+        <p:txBody>
+          <a:bodyPr/>
+          <a:p/>
+        </p:txBody>
       </p:sp>
       <p:sp>
         <p:nvSpPr>
@@ -7633,6 +8109,10 @@
             <a:prstDash val="solid"/>
           </a:ln>
         </p:spPr>
+        <p:txBody>
+          <a:bodyPr/>
+          <a:p/>
+        </p:txBody>
       </p:sp>
       <p:sp>
         <p:nvSpPr>
@@ -7653,6 +8133,10 @@
           </a:solidFill>
           <a:ln/>
         </p:spPr>
+        <p:txBody>
+          <a:bodyPr/>
+          <a:p/>
+        </p:txBody>
       </p:sp>
       <p:sp>
         <p:nvSpPr>
@@ -7712,6 +8196,10 @@
           </a:solidFill>
           <a:ln/>
         </p:spPr>
+        <p:txBody>
+          <a:bodyPr/>
+          <a:p/>
+        </p:txBody>
       </p:sp>
       <p:sp>
         <p:nvSpPr>
@@ -7774,6 +8262,10 @@
             <a:prstDash val="dash"/>
           </a:ln>
         </p:spPr>
+        <p:txBody>
+          <a:bodyPr/>
+          <a:p/>
+        </p:txBody>
       </p:sp>
       <p:sp>
         <p:nvSpPr>
@@ -7797,6 +8289,10 @@
             <a:prstDash val="dash"/>
           </a:ln>
         </p:spPr>
+        <p:txBody>
+          <a:bodyPr/>
+          <a:p/>
+        </p:txBody>
       </p:sp>
       <p:sp>
         <p:nvSpPr>
@@ -7820,6 +8316,10 @@
             <a:prstDash val="dash"/>
           </a:ln>
         </p:spPr>
+        <p:txBody>
+          <a:bodyPr/>
+          <a:p/>
+        </p:txBody>
       </p:sp>
       <p:sp>
         <p:nvSpPr>
@@ -7843,6 +8343,10 @@
             <a:prstDash val="dash"/>
           </a:ln>
         </p:spPr>
+        <p:txBody>
+          <a:bodyPr/>
+          <a:p/>
+        </p:txBody>
       </p:sp>
       <p:sp>
         <p:nvSpPr>
@@ -7866,6 +8370,10 @@
             <a:prstDash val="dash"/>
           </a:ln>
         </p:spPr>
+        <p:txBody>
+          <a:bodyPr/>
+          <a:p/>
+        </p:txBody>
       </p:sp>
       <p:sp>
         <p:nvSpPr>
@@ -7889,6 +8397,10 @@
             <a:prstDash val="dash"/>
           </a:ln>
         </p:spPr>
+        <p:txBody>
+          <a:bodyPr/>
+          <a:p/>
+        </p:txBody>
       </p:sp>
       <p:sp>
         <p:nvSpPr>
@@ -7912,6 +8424,10 @@
             <a:prstDash val="dash"/>
           </a:ln>
         </p:spPr>
+        <p:txBody>
+          <a:bodyPr/>
+          <a:p/>
+        </p:txBody>
       </p:sp>
       <p:sp>
         <p:nvSpPr>
@@ -7935,6 +8451,10 @@
             <a:prstDash val="dash"/>
           </a:ln>
         </p:spPr>
+        <p:txBody>
+          <a:bodyPr/>
+          <a:p/>
+        </p:txBody>
       </p:sp>
       <p:sp>
         <p:nvSpPr>
@@ -7958,6 +8478,10 @@
             <a:prstDash val="dash"/>
           </a:ln>
         </p:spPr>
+        <p:txBody>
+          <a:bodyPr/>
+          <a:p/>
+        </p:txBody>
       </p:sp>
       <p:sp>
         <p:nvSpPr>
@@ -7981,6 +8505,10 @@
             <a:prstDash val="dash"/>
           </a:ln>
         </p:spPr>
+        <p:txBody>
+          <a:bodyPr/>
+          <a:p/>
+        </p:txBody>
       </p:sp>
       <p:sp>
         <p:nvSpPr>
@@ -8004,6 +8532,10 @@
             <a:prstDash val="dash"/>
           </a:ln>
         </p:spPr>
+        <p:txBody>
+          <a:bodyPr/>
+          <a:p/>
+        </p:txBody>
       </p:sp>
       <p:sp>
         <p:nvSpPr>
@@ -8027,6 +8559,10 @@
             <a:prstDash val="dash"/>
           </a:ln>
         </p:spPr>
+        <p:txBody>
+          <a:bodyPr/>
+          <a:p/>
+        </p:txBody>
       </p:sp>
       <p:sp>
         <p:nvSpPr>
@@ -8050,6 +8586,10 @@
             <a:prstDash val="dash"/>
           </a:ln>
         </p:spPr>
+        <p:txBody>
+          <a:bodyPr/>
+          <a:p/>
+        </p:txBody>
       </p:sp>
       <p:sp>
         <p:nvSpPr>
@@ -8073,6 +8613,10 @@
             <a:prstDash val="dash"/>
           </a:ln>
         </p:spPr>
+        <p:txBody>
+          <a:bodyPr/>
+          <a:p/>
+        </p:txBody>
       </p:sp>
       <p:sp>
         <p:nvSpPr>
@@ -8096,6 +8640,10 @@
             <a:prstDash val="dash"/>
           </a:ln>
         </p:spPr>
+        <p:txBody>
+          <a:bodyPr/>
+          <a:p/>
+        </p:txBody>
       </p:sp>
       <p:sp>
         <p:nvSpPr>
@@ -8119,6 +8667,10 @@
             <a:prstDash val="dash"/>
           </a:ln>
         </p:spPr>
+        <p:txBody>
+          <a:bodyPr/>
+          <a:p/>
+        </p:txBody>
       </p:sp>
       <p:sp>
         <p:nvSpPr>
@@ -8142,6 +8694,10 @@
             <a:prstDash val="dash"/>
           </a:ln>
         </p:spPr>
+        <p:txBody>
+          <a:bodyPr/>
+          <a:p/>
+        </p:txBody>
       </p:sp>
       <p:sp>
         <p:nvSpPr>
@@ -8165,6 +8721,10 @@
             <a:prstDash val="dash"/>
           </a:ln>
         </p:spPr>
+        <p:txBody>
+          <a:bodyPr/>
+          <a:p/>
+        </p:txBody>
       </p:sp>
       <p:sp>
         <p:nvSpPr>
@@ -8188,6 +8748,10 @@
             <a:prstDash val="dash"/>
           </a:ln>
         </p:spPr>
+        <p:txBody>
+          <a:bodyPr/>
+          <a:p/>
+        </p:txBody>
       </p:sp>
       <p:sp>
         <p:nvSpPr>
@@ -8211,6 +8775,10 @@
             <a:prstDash val="dash"/>
           </a:ln>
         </p:spPr>
+        <p:txBody>
+          <a:bodyPr/>
+          <a:p/>
+        </p:txBody>
       </p:sp>
       <p:sp>
         <p:nvSpPr>
@@ -8234,6 +8802,10 @@
             <a:prstDash val="dash"/>
           </a:ln>
         </p:spPr>
+        <p:txBody>
+          <a:bodyPr/>
+          <a:p/>
+        </p:txBody>
       </p:sp>
       <p:sp>
         <p:nvSpPr>
@@ -8257,6 +8829,10 @@
             <a:prstDash val="dash"/>
           </a:ln>
         </p:spPr>
+        <p:txBody>
+          <a:bodyPr/>
+          <a:p/>
+        </p:txBody>
       </p:sp>
       <p:sp>
         <p:nvSpPr>
@@ -8280,6 +8856,10 @@
             <a:prstDash val="dash"/>
           </a:ln>
         </p:spPr>
+        <p:txBody>
+          <a:bodyPr/>
+          <a:p/>
+        </p:txBody>
       </p:sp>
       <p:sp>
         <p:nvSpPr>
@@ -8303,6 +8883,10 @@
             <a:prstDash val="dash"/>
           </a:ln>
         </p:spPr>
+        <p:txBody>
+          <a:bodyPr/>
+          <a:p/>
+        </p:txBody>
       </p:sp>
       <p:sp>
         <p:nvSpPr>
@@ -8326,6 +8910,10 @@
             <a:prstDash val="dash"/>
           </a:ln>
         </p:spPr>
+        <p:txBody>
+          <a:bodyPr/>
+          <a:p/>
+        </p:txBody>
       </p:sp>
       <p:sp>
         <p:nvSpPr>
@@ -8349,6 +8937,10 @@
             <a:prstDash val="dash"/>
           </a:ln>
         </p:spPr>
+        <p:txBody>
+          <a:bodyPr/>
+          <a:p/>
+        </p:txBody>
       </p:sp>
       <p:sp>
         <p:nvSpPr>
@@ -8372,6 +8964,10 @@
             <a:prstDash val="dash"/>
           </a:ln>
         </p:spPr>
+        <p:txBody>
+          <a:bodyPr/>
+          <a:p/>
+        </p:txBody>
       </p:sp>
       <p:sp>
         <p:nvSpPr>
@@ -8395,6 +8991,10 @@
             <a:prstDash val="dash"/>
           </a:ln>
         </p:spPr>
+        <p:txBody>
+          <a:bodyPr/>
+          <a:p/>
+        </p:txBody>
       </p:sp>
       <p:sp>
         <p:nvSpPr>
@@ -8418,6 +9018,10 @@
             <a:prstDash val="dash"/>
           </a:ln>
         </p:spPr>
+        <p:txBody>
+          <a:bodyPr/>
+          <a:p/>
+        </p:txBody>
       </p:sp>
       <p:sp>
         <p:nvSpPr>
@@ -8441,6 +9045,10 @@
             <a:prstDash val="dash"/>
           </a:ln>
         </p:spPr>
+        <p:txBody>
+          <a:bodyPr/>
+          <a:p/>
+        </p:txBody>
       </p:sp>
       <p:sp>
         <p:nvSpPr>
@@ -8464,6 +9072,10 @@
             <a:prstDash val="dash"/>
           </a:ln>
         </p:spPr>
+        <p:txBody>
+          <a:bodyPr/>
+          <a:p/>
+        </p:txBody>
       </p:sp>
       <p:sp>
         <p:nvSpPr>
@@ -8487,6 +9099,10 @@
             <a:prstDash val="dash"/>
           </a:ln>
         </p:spPr>
+        <p:txBody>
+          <a:bodyPr/>
+          <a:p/>
+        </p:txBody>
       </p:sp>
       <p:sp>
         <p:nvSpPr>
@@ -8510,6 +9126,10 @@
             <a:prstDash val="dash"/>
           </a:ln>
         </p:spPr>
+        <p:txBody>
+          <a:bodyPr/>
+          <a:p/>
+        </p:txBody>
       </p:sp>
       <p:sp>
         <p:nvSpPr>
@@ -8533,6 +9153,10 @@
             <a:prstDash val="dash"/>
           </a:ln>
         </p:spPr>
+        <p:txBody>
+          <a:bodyPr/>
+          <a:p/>
+        </p:txBody>
       </p:sp>
       <p:sp>
         <p:nvSpPr>
@@ -8556,6 +9180,10 @@
             <a:prstDash val="dash"/>
           </a:ln>
         </p:spPr>
+        <p:txBody>
+          <a:bodyPr/>
+          <a:p/>
+        </p:txBody>
       </p:sp>
       <p:sp>
         <p:nvSpPr>
@@ -8579,6 +9207,10 @@
             <a:prstDash val="dash"/>
           </a:ln>
         </p:spPr>
+        <p:txBody>
+          <a:bodyPr/>
+          <a:p/>
+        </p:txBody>
       </p:sp>
       <p:sp>
         <p:nvSpPr>
@@ -8602,6 +9234,10 @@
             <a:prstDash val="dash"/>
           </a:ln>
         </p:spPr>
+        <p:txBody>
+          <a:bodyPr/>
+          <a:p/>
+        </p:txBody>
       </p:sp>
       <p:sp>
         <p:nvSpPr>
@@ -8625,6 +9261,10 @@
             <a:prstDash val="dash"/>
           </a:ln>
         </p:spPr>
+        <p:txBody>
+          <a:bodyPr/>
+          <a:p/>
+        </p:txBody>
       </p:sp>
       <p:sp>
         <p:nvSpPr>
@@ -8648,6 +9288,10 @@
             <a:prstDash val="dash"/>
           </a:ln>
         </p:spPr>
+        <p:txBody>
+          <a:bodyPr/>
+          <a:p/>
+        </p:txBody>
       </p:sp>
       <p:sp>
         <p:nvSpPr>
@@ -8671,6 +9315,10 @@
             <a:prstDash val="dash"/>
           </a:ln>
         </p:spPr>
+        <p:txBody>
+          <a:bodyPr/>
+          <a:p/>
+        </p:txBody>
       </p:sp>
       <p:sp>
         <p:nvSpPr>
@@ -8694,6 +9342,10 @@
             <a:prstDash val="dash"/>
           </a:ln>
         </p:spPr>
+        <p:txBody>
+          <a:bodyPr/>
+          <a:p/>
+        </p:txBody>
       </p:sp>
       <p:sp>
         <p:nvSpPr>
@@ -8717,6 +9369,10 @@
             <a:prstDash val="dash"/>
           </a:ln>
         </p:spPr>
+        <p:txBody>
+          <a:bodyPr/>
+          <a:p/>
+        </p:txBody>
       </p:sp>
       <p:sp>
         <p:nvSpPr>
@@ -8740,6 +9396,10 @@
             <a:prstDash val="dash"/>
           </a:ln>
         </p:spPr>
+        <p:txBody>
+          <a:bodyPr/>
+          <a:p/>
+        </p:txBody>
       </p:sp>
       <p:sp>
         <p:nvSpPr>
@@ -8763,6 +9423,10 @@
             <a:prstDash val="dash"/>
           </a:ln>
         </p:spPr>
+        <p:txBody>
+          <a:bodyPr/>
+          <a:p/>
+        </p:txBody>
       </p:sp>
       <p:sp>
         <p:nvSpPr>
@@ -8786,6 +9450,10 @@
             <a:prstDash val="dash"/>
           </a:ln>
         </p:spPr>
+        <p:txBody>
+          <a:bodyPr/>
+          <a:p/>
+        </p:txBody>
       </p:sp>
       <p:sp>
         <p:nvSpPr>
@@ -8809,6 +9477,10 @@
             <a:prstDash val="dash"/>
           </a:ln>
         </p:spPr>
+        <p:txBody>
+          <a:bodyPr/>
+          <a:p/>
+        </p:txBody>
       </p:sp>
       <p:sp>
         <p:nvSpPr>
@@ -8832,6 +9504,10 @@
             <a:prstDash val="dash"/>
           </a:ln>
         </p:spPr>
+        <p:txBody>
+          <a:bodyPr/>
+          <a:p/>
+        </p:txBody>
       </p:sp>
       <p:sp>
         <p:nvSpPr>
@@ -8855,6 +9531,10 @@
             <a:prstDash val="dash"/>
           </a:ln>
         </p:spPr>
+        <p:txBody>
+          <a:bodyPr/>
+          <a:p/>
+        </p:txBody>
       </p:sp>
       <p:sp>
         <p:nvSpPr>
@@ -8878,6 +9558,10 @@
             <a:prstDash val="dash"/>
           </a:ln>
         </p:spPr>
+        <p:txBody>
+          <a:bodyPr/>
+          <a:p/>
+        </p:txBody>
       </p:sp>
       <p:sp>
         <p:nvSpPr>
@@ -8901,6 +9585,10 @@
             <a:prstDash val="dash"/>
           </a:ln>
         </p:spPr>
+        <p:txBody>
+          <a:bodyPr/>
+          <a:p/>
+        </p:txBody>
       </p:sp>
       <p:sp>
         <p:nvSpPr>
@@ -8924,6 +9612,10 @@
             <a:prstDash val="dash"/>
           </a:ln>
         </p:spPr>
+        <p:txBody>
+          <a:bodyPr/>
+          <a:p/>
+        </p:txBody>
       </p:sp>
       <p:sp>
         <p:nvSpPr>
@@ -8947,6 +9639,10 @@
             <a:prstDash val="dash"/>
           </a:ln>
         </p:spPr>
+        <p:txBody>
+          <a:bodyPr/>
+          <a:p/>
+        </p:txBody>
       </p:sp>
       <p:sp>
         <p:nvSpPr>
@@ -8970,6 +9666,10 @@
             <a:prstDash val="dash"/>
           </a:ln>
         </p:spPr>
+        <p:txBody>
+          <a:bodyPr/>
+          <a:p/>
+        </p:txBody>
       </p:sp>
       <p:sp>
         <p:nvSpPr>
@@ -8993,6 +9693,10 @@
             <a:prstDash val="dash"/>
           </a:ln>
         </p:spPr>
+        <p:txBody>
+          <a:bodyPr/>
+          <a:p/>
+        </p:txBody>
       </p:sp>
       <p:sp>
         <p:nvSpPr>
@@ -9016,6 +9720,10 @@
             <a:prstDash val="dash"/>
           </a:ln>
         </p:spPr>
+        <p:txBody>
+          <a:bodyPr/>
+          <a:p/>
+        </p:txBody>
       </p:sp>
       <p:sp>
         <p:nvSpPr>
@@ -9039,6 +9747,10 @@
             <a:prstDash val="dash"/>
           </a:ln>
         </p:spPr>
+        <p:txBody>
+          <a:bodyPr/>
+          <a:p/>
+        </p:txBody>
       </p:sp>
       <p:sp>
         <p:nvSpPr>
@@ -9062,6 +9774,10 @@
             <a:prstDash val="dash"/>
           </a:ln>
         </p:spPr>
+        <p:txBody>
+          <a:bodyPr/>
+          <a:p/>
+        </p:txBody>
       </p:sp>
       <p:sp>
         <p:nvSpPr>
@@ -9085,6 +9801,10 @@
             <a:prstDash val="dash"/>
           </a:ln>
         </p:spPr>
+        <p:txBody>
+          <a:bodyPr/>
+          <a:p/>
+        </p:txBody>
       </p:sp>
       <p:sp>
         <p:nvSpPr>
@@ -9108,6 +9828,10 @@
             <a:prstDash val="dash"/>
           </a:ln>
         </p:spPr>
+        <p:txBody>
+          <a:bodyPr/>
+          <a:p/>
+        </p:txBody>
       </p:sp>
       <p:sp>
         <p:nvSpPr>
@@ -9131,6 +9855,10 @@
             <a:prstDash val="dash"/>
           </a:ln>
         </p:spPr>
+        <p:txBody>
+          <a:bodyPr/>
+          <a:p/>
+        </p:txBody>
       </p:sp>
       <p:sp>
         <p:nvSpPr>
@@ -9154,6 +9882,10 @@
             <a:prstDash val="solid"/>
           </a:ln>
         </p:spPr>
+        <p:txBody>
+          <a:bodyPr/>
+          <a:p/>
+        </p:txBody>
       </p:sp>
       <p:sp>
         <p:nvSpPr>
@@ -9177,6 +9909,10 @@
             <a:prstDash val="solid"/>
           </a:ln>
         </p:spPr>
+        <p:txBody>
+          <a:bodyPr/>
+          <a:p/>
+        </p:txBody>
       </p:sp>
       <p:sp>
         <p:nvSpPr>
@@ -9200,6 +9936,10 @@
             <a:prstDash val="solid"/>
           </a:ln>
         </p:spPr>
+        <p:txBody>
+          <a:bodyPr/>
+          <a:p/>
+        </p:txBody>
       </p:sp>
       <p:sp>
         <p:nvSpPr>
@@ -9223,6 +9963,10 @@
             <a:prstDash val="solid"/>
           </a:ln>
         </p:spPr>
+        <p:txBody>
+          <a:bodyPr/>
+          <a:p/>
+        </p:txBody>
       </p:sp>
       <p:sp>
         <p:nvSpPr>
@@ -9246,6 +9990,10 @@
             <a:prstDash val="solid"/>
           </a:ln>
         </p:spPr>
+        <p:txBody>
+          <a:bodyPr/>
+          <a:p/>
+        </p:txBody>
       </p:sp>
       <p:sp>
         <p:nvSpPr>
@@ -9269,6 +10017,10 @@
             <a:prstDash val="solid"/>
           </a:ln>
         </p:spPr>
+        <p:txBody>
+          <a:bodyPr/>
+          <a:p/>
+        </p:txBody>
       </p:sp>
       <p:sp>
         <p:nvSpPr>
@@ -9292,6 +10044,10 @@
             <a:prstDash val="solid"/>
           </a:ln>
         </p:spPr>
+        <p:txBody>
+          <a:bodyPr/>
+          <a:p/>
+        </p:txBody>
       </p:sp>
       <p:sp>
         <p:nvSpPr>
@@ -9315,6 +10071,10 @@
             <a:prstDash val="solid"/>
           </a:ln>
         </p:spPr>
+        <p:txBody>
+          <a:bodyPr/>
+          <a:p/>
+        </p:txBody>
       </p:sp>
       <p:sp>
         <p:nvSpPr>
@@ -9338,6 +10098,10 @@
             <a:prstDash val="solid"/>
           </a:ln>
         </p:spPr>
+        <p:txBody>
+          <a:bodyPr/>
+          <a:p/>
+        </p:txBody>
       </p:sp>
       <p:sp>
         <p:nvSpPr>
@@ -9361,6 +10125,10 @@
             <a:prstDash val="solid"/>
           </a:ln>
         </p:spPr>
+        <p:txBody>
+          <a:bodyPr/>
+          <a:p/>
+        </p:txBody>
       </p:sp>
       <p:sp>
         <p:nvSpPr>
@@ -9384,6 +10152,10 @@
             <a:prstDash val="solid"/>
           </a:ln>
         </p:spPr>
+        <p:txBody>
+          <a:bodyPr/>
+          <a:p/>
+        </p:txBody>
       </p:sp>
       <p:sp>
         <p:nvSpPr>
@@ -9407,6 +10179,10 @@
             <a:prstDash val="solid"/>
           </a:ln>
         </p:spPr>
+        <p:txBody>
+          <a:bodyPr/>
+          <a:p/>
+        </p:txBody>
       </p:sp>
       <p:sp>
         <p:nvSpPr>
@@ -9430,6 +10206,10 @@
             <a:prstDash val="solid"/>
           </a:ln>
         </p:spPr>
+        <p:txBody>
+          <a:bodyPr/>
+          <a:p/>
+        </p:txBody>
       </p:sp>
       <p:sp>
         <p:nvSpPr>
@@ -9453,6 +10233,10 @@
             <a:prstDash val="solid"/>
           </a:ln>
         </p:spPr>
+        <p:txBody>
+          <a:bodyPr/>
+          <a:p/>
+        </p:txBody>
       </p:sp>
       <p:sp>
         <p:nvSpPr>
@@ -9476,6 +10260,10 @@
             <a:prstDash val="solid"/>
           </a:ln>
         </p:spPr>
+        <p:txBody>
+          <a:bodyPr/>
+          <a:p/>
+        </p:txBody>
       </p:sp>
       <p:sp>
         <p:nvSpPr>
@@ -9499,6 +10287,10 @@
             <a:prstDash val="solid"/>
           </a:ln>
         </p:spPr>
+        <p:txBody>
+          <a:bodyPr/>
+          <a:p/>
+        </p:txBody>
       </p:sp>
       <p:sp>
         <p:nvSpPr>
@@ -9522,6 +10314,10 @@
             <a:prstDash val="solid"/>
           </a:ln>
         </p:spPr>
+        <p:txBody>
+          <a:bodyPr/>
+          <a:p/>
+        </p:txBody>
       </p:sp>
       <p:sp>
         <p:nvSpPr>
@@ -9545,6 +10341,10 @@
             <a:prstDash val="solid"/>
           </a:ln>
         </p:spPr>
+        <p:txBody>
+          <a:bodyPr/>
+          <a:p/>
+        </p:txBody>
       </p:sp>
       <p:sp>
         <p:nvSpPr>
@@ -9568,6 +10368,10 @@
             <a:prstDash val="solid"/>
           </a:ln>
         </p:spPr>
+        <p:txBody>
+          <a:bodyPr/>
+          <a:p/>
+        </p:txBody>
       </p:sp>
       <p:sp>
         <p:nvSpPr>
@@ -9591,6 +10395,10 @@
             <a:prstDash val="solid"/>
           </a:ln>
         </p:spPr>
+        <p:txBody>
+          <a:bodyPr/>
+          <a:p/>
+        </p:txBody>
       </p:sp>
       <p:sp>
         <p:nvSpPr>
@@ -9614,6 +10422,10 @@
             <a:prstDash val="solid"/>
           </a:ln>
         </p:spPr>
+        <p:txBody>
+          <a:bodyPr/>
+          <a:p/>
+        </p:txBody>
       </p:sp>
       <p:sp>
         <p:nvSpPr>
@@ -9637,6 +10449,10 @@
             <a:prstDash val="solid"/>
           </a:ln>
         </p:spPr>
+        <p:txBody>
+          <a:bodyPr/>
+          <a:p/>
+        </p:txBody>
       </p:sp>
       <p:sp>
         <p:nvSpPr>
@@ -9660,6 +10476,10 @@
             <a:prstDash val="solid"/>
           </a:ln>
         </p:spPr>
+        <p:txBody>
+          <a:bodyPr/>
+          <a:p/>
+        </p:txBody>
       </p:sp>
       <p:sp>
         <p:nvSpPr>
@@ -9683,6 +10503,10 @@
             <a:prstDash val="solid"/>
           </a:ln>
         </p:spPr>
+        <p:txBody>
+          <a:bodyPr/>
+          <a:p/>
+        </p:txBody>
       </p:sp>
       <p:sp>
         <p:nvSpPr>
@@ -9706,6 +10530,10 @@
             <a:prstDash val="solid"/>
           </a:ln>
         </p:spPr>
+        <p:txBody>
+          <a:bodyPr/>
+          <a:p/>
+        </p:txBody>
       </p:sp>
       <p:sp>
         <p:nvSpPr>
@@ -9729,6 +10557,10 @@
             <a:prstDash val="solid"/>
           </a:ln>
         </p:spPr>
+        <p:txBody>
+          <a:bodyPr/>
+          <a:p/>
+        </p:txBody>
       </p:sp>
       <p:sp>
         <p:nvSpPr>
@@ -9752,6 +10584,10 @@
             <a:prstDash val="solid"/>
           </a:ln>
         </p:spPr>
+        <p:txBody>
+          <a:bodyPr/>
+          <a:p/>
+        </p:txBody>
       </p:sp>
       <p:sp>
         <p:nvSpPr>
@@ -9775,6 +10611,10 @@
             <a:prstDash val="solid"/>
           </a:ln>
         </p:spPr>
+        <p:txBody>
+          <a:bodyPr/>
+          <a:p/>
+        </p:txBody>
       </p:sp>
       <p:sp>
         <p:nvSpPr>
@@ -9798,6 +10638,10 @@
             <a:prstDash val="solid"/>
           </a:ln>
         </p:spPr>
+        <p:txBody>
+          <a:bodyPr/>
+          <a:p/>
+        </p:txBody>
       </p:sp>
       <p:sp>
         <p:nvSpPr>
@@ -9821,6 +10665,10 @@
             <a:prstDash val="solid"/>
           </a:ln>
         </p:spPr>
+        <p:txBody>
+          <a:bodyPr/>
+          <a:p/>
+        </p:txBody>
       </p:sp>
       <p:sp>
         <p:nvSpPr>
@@ -9844,6 +10692,10 @@
             <a:prstDash val="solid"/>
           </a:ln>
         </p:spPr>
+        <p:txBody>
+          <a:bodyPr/>
+          <a:p/>
+        </p:txBody>
       </p:sp>
       <p:sp>
         <p:nvSpPr>
@@ -9867,6 +10719,10 @@
             <a:prstDash val="solid"/>
           </a:ln>
         </p:spPr>
+        <p:txBody>
+          <a:bodyPr/>
+          <a:p/>
+        </p:txBody>
       </p:sp>
       <p:sp>
         <p:nvSpPr>
@@ -9890,6 +10746,10 @@
             <a:prstDash val="solid"/>
           </a:ln>
         </p:spPr>
+        <p:txBody>
+          <a:bodyPr/>
+          <a:p/>
+        </p:txBody>
       </p:sp>
       <p:sp>
         <p:nvSpPr>
@@ -9913,6 +10773,10 @@
             <a:prstDash val="solid"/>
           </a:ln>
         </p:spPr>
+        <p:txBody>
+          <a:bodyPr/>
+          <a:p/>
+        </p:txBody>
       </p:sp>
       <p:sp>
         <p:nvSpPr>
@@ -9936,6 +10800,10 @@
             <a:prstDash val="solid"/>
           </a:ln>
         </p:spPr>
+        <p:txBody>
+          <a:bodyPr/>
+          <a:p/>
+        </p:txBody>
       </p:sp>
       <p:sp>
         <p:nvSpPr>
@@ -9959,6 +10827,10 @@
             <a:prstDash val="solid"/>
           </a:ln>
         </p:spPr>
+        <p:txBody>
+          <a:bodyPr/>
+          <a:p/>
+        </p:txBody>
       </p:sp>
       <p:sp>
         <p:nvSpPr>
@@ -9982,6 +10854,10 @@
             <a:prstDash val="solid"/>
           </a:ln>
         </p:spPr>
+        <p:txBody>
+          <a:bodyPr/>
+          <a:p/>
+        </p:txBody>
       </p:sp>
       <p:sp>
         <p:nvSpPr>
@@ -10005,6 +10881,10 @@
             <a:prstDash val="solid"/>
           </a:ln>
         </p:spPr>
+        <p:txBody>
+          <a:bodyPr/>
+          <a:p/>
+        </p:txBody>
       </p:sp>
       <p:sp>
         <p:nvSpPr>
@@ -10028,6 +10908,10 @@
             <a:prstDash val="solid"/>
           </a:ln>
         </p:spPr>
+        <p:txBody>
+          <a:bodyPr/>
+          <a:p/>
+        </p:txBody>
       </p:sp>
       <p:sp>
         <p:nvSpPr>
@@ -10051,6 +10935,10 @@
             <a:prstDash val="solid"/>
           </a:ln>
         </p:spPr>
+        <p:txBody>
+          <a:bodyPr/>
+          <a:p/>
+        </p:txBody>
       </p:sp>
       <p:sp>
         <p:nvSpPr>
@@ -10076,6 +10964,10 @@
             <a:prstDash val="solid"/>
           </a:ln>
         </p:spPr>
+        <p:txBody>
+          <a:bodyPr/>
+          <a:p/>
+        </p:txBody>
       </p:sp>
       <p:sp>
         <p:nvSpPr>
@@ -10096,6 +10988,10 @@
           </a:solidFill>
           <a:ln/>
         </p:spPr>
+        <p:txBody>
+          <a:bodyPr/>
+          <a:p/>
+        </p:txBody>
       </p:sp>
       <p:sp>
         <p:nvSpPr>
@@ -10282,6 +11178,10 @@
             <a:prstDash val="solid"/>
           </a:ln>
         </p:spPr>
+        <p:txBody>
+          <a:bodyPr/>
+          <a:p/>
+        </p:txBody>
       </p:sp>
       <p:sp>
         <p:nvSpPr>
@@ -10502,6 +11402,10 @@
             </a:outerShdw>
           </a:effectLst>
         </p:spPr>
+        <p:txBody>
+          <a:bodyPr/>
+          <a:p/>
+        </p:txBody>
       </p:sp>
       <p:sp>
         <p:nvSpPr>
@@ -10524,6 +11428,10 @@
           </a:solidFill>
           <a:ln/>
         </p:spPr>
+        <p:txBody>
+          <a:bodyPr/>
+          <a:p/>
+        </p:txBody>
       </p:sp>
       <p:sp>
         <p:nvSpPr>
@@ -10546,6 +11454,10 @@
           </a:solidFill>
           <a:ln/>
         </p:spPr>
+        <p:txBody>
+          <a:bodyPr/>
+          <a:p/>
+        </p:txBody>
       </p:sp>
       <p:sp>
         <p:nvSpPr>
@@ -10569,6 +11481,10 @@
             <a:prstDash val="solid"/>
           </a:ln>
         </p:spPr>
+        <p:txBody>
+          <a:bodyPr/>
+          <a:p/>
+        </p:txBody>
       </p:sp>
       <p:sp>
         <p:nvSpPr>
@@ -10592,6 +11508,10 @@
             <a:prstDash val="solid"/>
           </a:ln>
         </p:spPr>
+        <p:txBody>
+          <a:bodyPr/>
+          <a:p/>
+        </p:txBody>
       </p:sp>
       <p:sp>
         <p:nvSpPr>
@@ -10615,6 +11535,10 @@
             <a:prstDash val="solid"/>
           </a:ln>
         </p:spPr>
+        <p:txBody>
+          <a:bodyPr/>
+          <a:p/>
+        </p:txBody>
       </p:sp>
       <p:sp>
         <p:nvSpPr>
@@ -10638,6 +11562,10 @@
             <a:prstDash val="solid"/>
           </a:ln>
         </p:spPr>
+        <p:txBody>
+          <a:bodyPr/>
+          <a:p/>
+        </p:txBody>
       </p:sp>
       <p:sp>
         <p:nvSpPr>
@@ -10661,6 +11589,10 @@
             <a:prstDash val="solid"/>
           </a:ln>
         </p:spPr>
+        <p:txBody>
+          <a:bodyPr/>
+          <a:p/>
+        </p:txBody>
       </p:sp>
       <p:sp>
         <p:nvSpPr>
@@ -10684,6 +11616,10 @@
             <a:prstDash val="solid"/>
           </a:ln>
         </p:spPr>
+        <p:txBody>
+          <a:bodyPr/>
+          <a:p/>
+        </p:txBody>
       </p:sp>
       <p:sp>
         <p:nvSpPr>
@@ -10704,6 +11640,10 @@
           </a:solidFill>
           <a:ln/>
         </p:spPr>
+        <p:txBody>
+          <a:bodyPr/>
+          <a:p/>
+        </p:txBody>
       </p:sp>
       <p:sp>
         <p:nvSpPr>
@@ -10763,6 +11703,10 @@
           </a:solidFill>
           <a:ln/>
         </p:spPr>
+        <p:txBody>
+          <a:bodyPr/>
+          <a:p/>
+        </p:txBody>
       </p:sp>
       <p:sp>
         <p:nvSpPr>
@@ -10829,6 +11773,10 @@
             <a:prstDash val="solid"/>
           </a:ln>
         </p:spPr>
+        <p:txBody>
+          <a:bodyPr/>
+          <a:p/>
+        </p:txBody>
       </p:sp>
       <p:sp>
         <p:nvSpPr>
@@ -10849,6 +11797,10 @@
           </a:solidFill>
           <a:ln/>
         </p:spPr>
+        <p:txBody>
+          <a:bodyPr/>
+          <a:p/>
+        </p:txBody>
       </p:sp>
       <p:sp>
         <p:nvSpPr>
@@ -10869,6 +11821,10 @@
           </a:solidFill>
           <a:ln/>
         </p:spPr>
+        <p:txBody>
+          <a:bodyPr/>
+          <a:p/>
+        </p:txBody>
       </p:sp>
       <p:sp>
         <p:nvSpPr>
@@ -10892,6 +11848,10 @@
             <a:prstDash val="solid"/>
           </a:ln>
         </p:spPr>
+        <p:txBody>
+          <a:bodyPr/>
+          <a:p/>
+        </p:txBody>
       </p:sp>
       <p:sp>
         <p:nvSpPr>
@@ -10919,6 +11879,10 @@
             <a:prstDash val="solid"/>
           </a:ln>
         </p:spPr>
+        <p:txBody>
+          <a:bodyPr/>
+          <a:p/>
+        </p:txBody>
       </p:sp>
       <p:sp>
         <p:nvSpPr>
@@ -10939,6 +11903,10 @@
           </a:solidFill>
           <a:ln/>
         </p:spPr>
+        <p:txBody>
+          <a:bodyPr/>
+          <a:p/>
+        </p:txBody>
       </p:sp>
       <p:sp>
         <p:nvSpPr>
@@ -10959,6 +11927,10 @@
           </a:solidFill>
           <a:ln/>
         </p:spPr>
+        <p:txBody>
+          <a:bodyPr/>
+          <a:p/>
+        </p:txBody>
       </p:sp>
       <p:sp>
         <p:nvSpPr>
@@ -10982,6 +11954,10 @@
             <a:prstDash val="solid"/>
           </a:ln>
         </p:spPr>
+        <p:txBody>
+          <a:bodyPr/>
+          <a:p/>
+        </p:txBody>
       </p:sp>
       <p:sp>
         <p:nvSpPr>
@@ -11009,6 +11985,10 @@
             <a:prstDash val="solid"/>
           </a:ln>
         </p:spPr>
+        <p:txBody>
+          <a:bodyPr/>
+          <a:p/>
+        </p:txBody>
       </p:sp>
       <p:sp>
         <p:nvSpPr>
@@ -11029,6 +12009,10 @@
           </a:solidFill>
           <a:ln/>
         </p:spPr>
+        <p:txBody>
+          <a:bodyPr/>
+          <a:p/>
+        </p:txBody>
       </p:sp>
       <p:sp>
         <p:nvSpPr>
@@ -11049,6 +12033,10 @@
           </a:solidFill>
           <a:ln/>
         </p:spPr>
+        <p:txBody>
+          <a:bodyPr/>
+          <a:p/>
+        </p:txBody>
       </p:sp>
       <p:sp>
         <p:nvSpPr>
@@ -11072,6 +12060,10 @@
             <a:prstDash val="solid"/>
           </a:ln>
         </p:spPr>
+        <p:txBody>
+          <a:bodyPr/>
+          <a:p/>
+        </p:txBody>
       </p:sp>
       <p:sp>
         <p:nvSpPr>
@@ -11099,6 +12091,10 @@
             <a:prstDash val="solid"/>
           </a:ln>
         </p:spPr>
+        <p:txBody>
+          <a:bodyPr/>
+          <a:p/>
+        </p:txBody>
       </p:sp>
       <p:sp>
         <p:nvSpPr>
@@ -11119,6 +12115,10 @@
           </a:solidFill>
           <a:ln/>
         </p:spPr>
+        <p:txBody>
+          <a:bodyPr/>
+          <a:p/>
+        </p:txBody>
       </p:sp>
       <p:sp>
         <p:nvSpPr>
@@ -11144,6 +12144,10 @@
             <a:prstDash val="solid"/>
           </a:ln>
         </p:spPr>
+        <p:txBody>
+          <a:bodyPr/>
+          <a:p/>
+        </p:txBody>
       </p:sp>
       <p:sp>
         <p:nvSpPr>
@@ -11164,6 +12168,10 @@
           </a:solidFill>
           <a:ln/>
         </p:spPr>
+        <p:txBody>
+          <a:bodyPr/>
+          <a:p/>
+        </p:txBody>
       </p:sp>
       <p:sp>
         <p:nvSpPr>
@@ -11189,6 +12197,10 @@
             <a:prstDash val="solid"/>
           </a:ln>
         </p:spPr>
+        <p:txBody>
+          <a:bodyPr/>
+          <a:p/>
+        </p:txBody>
       </p:sp>
       <p:sp>
         <p:nvSpPr>
@@ -11375,6 +12387,10 @@
             <a:prstDash val="solid"/>
           </a:ln>
         </p:spPr>
+        <p:txBody>
+          <a:bodyPr/>
+          <a:p/>
+        </p:txBody>
       </p:sp>
       <p:sp>
         <p:nvSpPr>
@@ -11595,6 +12611,10 @@
             </a:outerShdw>
           </a:effectLst>
         </p:spPr>
+        <p:txBody>
+          <a:bodyPr/>
+          <a:p/>
+        </p:txBody>
       </p:sp>
       <p:sp>
         <p:nvSpPr>
@@ -11617,6 +12637,10 @@
           </a:solidFill>
           <a:ln/>
         </p:spPr>
+        <p:txBody>
+          <a:bodyPr/>
+          <a:p/>
+        </p:txBody>
       </p:sp>
       <p:sp>
         <p:nvSpPr>
@@ -11639,6 +12663,10 @@
           </a:solidFill>
           <a:ln/>
         </p:spPr>
+        <p:txBody>
+          <a:bodyPr/>
+          <a:p/>
+        </p:txBody>
       </p:sp>
       <p:sp>
         <p:nvSpPr>
@@ -11662,6 +12690,10 @@
             <a:prstDash val="solid"/>
           </a:ln>
         </p:spPr>
+        <p:txBody>
+          <a:bodyPr/>
+          <a:p/>
+        </p:txBody>
       </p:sp>
       <p:sp>
         <p:nvSpPr>
@@ -11685,6 +12717,10 @@
             <a:prstDash val="solid"/>
           </a:ln>
         </p:spPr>
+        <p:txBody>
+          <a:bodyPr/>
+          <a:p/>
+        </p:txBody>
       </p:sp>
       <p:sp>
         <p:nvSpPr>
@@ -11708,6 +12744,10 @@
             <a:prstDash val="solid"/>
           </a:ln>
         </p:spPr>
+        <p:txBody>
+          <a:bodyPr/>
+          <a:p/>
+        </p:txBody>
       </p:sp>
       <p:sp>
         <p:nvSpPr>
@@ -11731,6 +12771,10 @@
             <a:prstDash val="solid"/>
           </a:ln>
         </p:spPr>
+        <p:txBody>
+          <a:bodyPr/>
+          <a:p/>
+        </p:txBody>
       </p:sp>
       <p:sp>
         <p:nvSpPr>
@@ -11754,6 +12798,10 @@
             <a:prstDash val="solid"/>
           </a:ln>
         </p:spPr>
+        <p:txBody>
+          <a:bodyPr/>
+          <a:p/>
+        </p:txBody>
       </p:sp>
       <p:sp>
         <p:nvSpPr>
@@ -11777,6 +12825,10 @@
             <a:prstDash val="solid"/>
           </a:ln>
         </p:spPr>
+        <p:txBody>
+          <a:bodyPr/>
+          <a:p/>
+        </p:txBody>
       </p:sp>
       <p:sp>
         <p:nvSpPr>
@@ -11797,6 +12849,10 @@
           </a:solidFill>
           <a:ln/>
         </p:spPr>
+        <p:txBody>
+          <a:bodyPr/>
+          <a:p/>
+        </p:txBody>
       </p:sp>
       <p:sp>
         <p:nvSpPr>
@@ -11856,6 +12912,10 @@
           </a:solidFill>
           <a:ln/>
         </p:spPr>
+        <p:txBody>
+          <a:bodyPr/>
+          <a:p/>
+        </p:txBody>
       </p:sp>
       <p:sp>
         <p:nvSpPr>
@@ -11920,6 +12980,10 @@
             <a:prstDash val="solid"/>
           </a:ln>
         </p:spPr>
+        <p:txBody>
+          <a:bodyPr/>
+          <a:p/>
+        </p:txBody>
       </p:sp>
       <p:sp>
         <p:nvSpPr>
@@ -11940,6 +13004,10 @@
           </a:solidFill>
           <a:ln/>
         </p:spPr>
+        <p:txBody>
+          <a:bodyPr/>
+          <a:p/>
+        </p:txBody>
       </p:sp>
       <p:sp>
         <p:nvSpPr>
@@ -12004,6 +13072,10 @@
             <a:prstDash val="solid"/>
           </a:ln>
         </p:spPr>
+        <p:txBody>
+          <a:bodyPr/>
+          <a:p/>
+        </p:txBody>
       </p:sp>
       <p:sp>
         <p:nvSpPr>
@@ -12024,6 +13096,10 @@
           </a:solidFill>
           <a:ln/>
         </p:spPr>
+        <p:txBody>
+          <a:bodyPr/>
+          <a:p/>
+        </p:txBody>
       </p:sp>
       <p:sp>
         <p:nvSpPr>
@@ -12083,6 +13159,10 @@
           </a:solidFill>
           <a:ln/>
         </p:spPr>
+        <p:txBody>
+          <a:bodyPr/>
+          <a:p/>
+        </p:txBody>
       </p:sp>
       <p:sp>
         <p:nvSpPr>
@@ -12110,6 +13190,10 @@
             <a:prstDash val="solid"/>
           </a:ln>
         </p:spPr>
+        <p:txBody>
+          <a:bodyPr/>
+          <a:p/>
+        </p:txBody>
       </p:sp>
       <p:sp>
         <p:nvSpPr>
@@ -12137,6 +13221,10 @@
             <a:prstDash val="solid"/>
           </a:ln>
         </p:spPr>
+        <p:txBody>
+          <a:bodyPr/>
+          <a:p/>
+        </p:txBody>
       </p:sp>
       <p:sp>
         <p:nvSpPr>
@@ -12164,6 +13252,10 @@
             <a:prstDash val="solid"/>
           </a:ln>
         </p:spPr>
+        <p:txBody>
+          <a:bodyPr/>
+          <a:p/>
+        </p:txBody>
       </p:sp>
       <p:sp>
         <p:nvSpPr>
@@ -12350,6 +13442,10 @@
             <a:prstDash val="solid"/>
           </a:ln>
         </p:spPr>
+        <p:txBody>
+          <a:bodyPr/>
+          <a:p/>
+        </p:txBody>
       </p:sp>
       <p:sp>
         <p:nvSpPr>
@@ -12536,7 +13632,7 @@
                 <a:ea typeface="Bookman Old Style" pitchFamily="34" charset="-122"/>
                 <a:cs typeface="Bookman Old Style" pitchFamily="34" charset="-120"/>
               </a:rPr>
-              <a:t>Ocho plantillas, unas 1010 actividades</a:t>
+              <a:t>Ocho plantillas, unas 2.800 actividades</a:t>
             </a:r>
             <a:endParaRPr lang="en-US" sz="3000" dirty="0"/>
           </a:p>
@@ -12568,6 +13664,10 @@
             <a:prstDash val="solid"/>
           </a:ln>
         </p:spPr>
+        <p:txBody>
+          <a:bodyPr/>
+          <a:p/>
+        </p:txBody>
       </p:sp>
       <p:sp>
         <p:nvSpPr>
@@ -12590,6 +13690,10 @@
           </a:solidFill>
           <a:ln/>
         </p:spPr>
+        <p:txBody>
+          <a:bodyPr/>
+          <a:p/>
+        </p:txBody>
       </p:sp>
       <p:sp>
         <p:nvSpPr>
@@ -12737,6 +13841,10 @@
             <a:prstDash val="solid"/>
           </a:ln>
         </p:spPr>
+        <p:txBody>
+          <a:bodyPr/>
+          <a:p/>
+        </p:txBody>
       </p:sp>
       <p:sp>
         <p:nvSpPr>
@@ -12759,6 +13867,10 @@
           </a:solidFill>
           <a:ln/>
         </p:spPr>
+        <p:txBody>
+          <a:bodyPr/>
+          <a:p/>
+        </p:txBody>
       </p:sp>
       <p:sp>
         <p:nvSpPr>
@@ -12906,6 +14018,10 @@
             <a:prstDash val="solid"/>
           </a:ln>
         </p:spPr>
+        <p:txBody>
+          <a:bodyPr/>
+          <a:p/>
+        </p:txBody>
       </p:sp>
       <p:sp>
         <p:nvSpPr>
@@ -12928,6 +14044,10 @@
           </a:solidFill>
           <a:ln/>
         </p:spPr>
+        <p:txBody>
+          <a:bodyPr/>
+          <a:p/>
+        </p:txBody>
       </p:sp>
       <p:sp>
         <p:nvSpPr>
@@ -13075,6 +14195,10 @@
             <a:prstDash val="solid"/>
           </a:ln>
         </p:spPr>
+        <p:txBody>
+          <a:bodyPr/>
+          <a:p/>
+        </p:txBody>
       </p:sp>
       <p:sp>
         <p:nvSpPr>
@@ -13097,6 +14221,10 @@
           </a:solidFill>
           <a:ln/>
         </p:spPr>
+        <p:txBody>
+          <a:bodyPr/>
+          <a:p/>
+        </p:txBody>
       </p:sp>
       <p:sp>
         <p:nvSpPr>
@@ -13244,6 +14372,10 @@
             <a:prstDash val="solid"/>
           </a:ln>
         </p:spPr>
+        <p:txBody>
+          <a:bodyPr/>
+          <a:p/>
+        </p:txBody>
       </p:sp>
       <p:sp>
         <p:nvSpPr>
@@ -13266,6 +14398,10 @@
           </a:solidFill>
           <a:ln/>
         </p:spPr>
+        <p:txBody>
+          <a:bodyPr/>
+          <a:p/>
+        </p:txBody>
       </p:sp>
       <p:sp>
         <p:nvSpPr>
@@ -13413,6 +14549,10 @@
             <a:prstDash val="solid"/>
           </a:ln>
         </p:spPr>
+        <p:txBody>
+          <a:bodyPr/>
+          <a:p/>
+        </p:txBody>
       </p:sp>
       <p:sp>
         <p:nvSpPr>
@@ -13435,6 +14575,10 @@
           </a:solidFill>
           <a:ln/>
         </p:spPr>
+        <p:txBody>
+          <a:bodyPr/>
+          <a:p/>
+        </p:txBody>
       </p:sp>
       <p:sp>
         <p:nvSpPr>
@@ -13582,6 +14726,10 @@
             <a:prstDash val="solid"/>
           </a:ln>
         </p:spPr>
+        <p:txBody>
+          <a:bodyPr/>
+          <a:p/>
+        </p:txBody>
       </p:sp>
       <p:sp>
         <p:nvSpPr>
@@ -13604,6 +14752,10 @@
           </a:solidFill>
           <a:ln/>
         </p:spPr>
+        <p:txBody>
+          <a:bodyPr/>
+          <a:p/>
+        </p:txBody>
       </p:sp>
       <p:sp>
         <p:nvSpPr>
@@ -13751,6 +14903,10 @@
             <a:prstDash val="solid"/>
           </a:ln>
         </p:spPr>
+        <p:txBody>
+          <a:bodyPr/>
+          <a:p/>
+        </p:txBody>
       </p:sp>
       <p:sp>
         <p:nvSpPr>
@@ -13773,6 +14929,10 @@
           </a:solidFill>
           <a:ln/>
         </p:spPr>
+        <p:txBody>
+          <a:bodyPr/>
+          <a:p/>
+        </p:txBody>
       </p:sp>
       <p:sp>
         <p:nvSpPr>
@@ -14037,6 +15197,10 @@
             </a:outerShdw>
           </a:effectLst>
         </p:spPr>
+        <p:txBody>
+          <a:bodyPr/>
+          <a:p/>
+        </p:txBody>
       </p:sp>
       <p:sp>
         <p:nvSpPr>
@@ -14177,6 +15341,10 @@
             <a:prstDash val="dash"/>
           </a:ln>
         </p:spPr>
+        <p:txBody>
+          <a:bodyPr/>
+          <a:p/>
+        </p:txBody>
       </p:sp>
       <p:sp>
         <p:nvSpPr>
@@ -14200,6 +15368,10 @@
             <a:prstDash val="solid"/>
           </a:ln>
         </p:spPr>
+        <p:txBody>
+          <a:bodyPr/>
+          <a:p/>
+        </p:txBody>
       </p:sp>
       <p:sp>
         <p:nvSpPr>
@@ -14223,6 +15395,10 @@
             <a:prstDash val="solid"/>
           </a:ln>
         </p:spPr>
+        <p:txBody>
+          <a:bodyPr/>
+          <a:p/>
+        </p:txBody>
       </p:sp>
       <p:sp>
         <p:nvSpPr>
@@ -14246,6 +15422,10 @@
             <a:prstDash val="solid"/>
           </a:ln>
         </p:spPr>
+        <p:txBody>
+          <a:bodyPr/>
+          <a:p/>
+        </p:txBody>
       </p:sp>
       <p:sp>
         <p:nvSpPr>
@@ -14269,6 +15449,10 @@
             <a:prstDash val="solid"/>
           </a:ln>
         </p:spPr>
+        <p:txBody>
+          <a:bodyPr/>
+          <a:p/>
+        </p:txBody>
       </p:sp>
       <p:sp>
         <p:nvSpPr>
@@ -14292,6 +15476,10 @@
             <a:prstDash val="solid"/>
           </a:ln>
         </p:spPr>
+        <p:txBody>
+          <a:bodyPr/>
+          <a:p/>
+        </p:txBody>
       </p:sp>
       <p:sp>
         <p:nvSpPr>
@@ -14315,6 +15503,10 @@
             <a:prstDash val="solid"/>
           </a:ln>
         </p:spPr>
+        <p:txBody>
+          <a:bodyPr/>
+          <a:p/>
+        </p:txBody>
       </p:sp>
       <p:sp>
         <p:nvSpPr>
@@ -14338,6 +15530,10 @@
             <a:prstDash val="solid"/>
           </a:ln>
         </p:spPr>
+        <p:txBody>
+          <a:bodyPr/>
+          <a:p/>
+        </p:txBody>
       </p:sp>
       <p:sp>
         <p:nvSpPr>
@@ -14358,6 +15554,10 @@
           </a:solidFill>
           <a:ln/>
         </p:spPr>
+        <p:txBody>
+          <a:bodyPr/>
+          <a:p/>
+        </p:txBody>
       </p:sp>
       <p:sp>
         <p:nvSpPr>
@@ -14378,6 +15578,10 @@
           </a:solidFill>
           <a:ln/>
         </p:spPr>
+        <p:txBody>
+          <a:bodyPr/>
+          <a:p/>
+        </p:txBody>
       </p:sp>
       <p:sp>
         <p:nvSpPr>
@@ -14398,6 +15602,10 @@
           </a:solidFill>
           <a:ln/>
         </p:spPr>
+        <p:txBody>
+          <a:bodyPr/>
+          <a:p/>
+        </p:txBody>
       </p:sp>
       <p:sp>
         <p:nvSpPr>
@@ -14418,6 +15626,10 @@
           </a:solidFill>
           <a:ln/>
         </p:spPr>
+        <p:txBody>
+          <a:bodyPr/>
+          <a:p/>
+        </p:txBody>
       </p:sp>
       <p:sp>
         <p:nvSpPr>
@@ -14438,6 +15650,10 @@
           </a:solidFill>
           <a:ln/>
         </p:spPr>
+        <p:txBody>
+          <a:bodyPr/>
+          <a:p/>
+        </p:txBody>
       </p:sp>
       <p:sp>
         <p:nvSpPr>
@@ -14458,6 +15674,10 @@
           </a:solidFill>
           <a:ln/>
         </p:spPr>
+        <p:txBody>
+          <a:bodyPr/>
+          <a:p/>
+        </p:txBody>
       </p:sp>
       <p:sp>
         <p:nvSpPr>
@@ -14478,6 +15698,10 @@
           </a:solidFill>
           <a:ln/>
         </p:spPr>
+        <p:txBody>
+          <a:bodyPr/>
+          <a:p/>
+        </p:txBody>
       </p:sp>
       <p:sp>
         <p:nvSpPr>
@@ -14498,6 +15722,10 @@
           </a:solidFill>
           <a:ln/>
         </p:spPr>
+        <p:txBody>
+          <a:bodyPr/>
+          <a:p/>
+        </p:txBody>
       </p:sp>
       <p:sp>
         <p:nvSpPr>
@@ -14525,6 +15753,10 @@
             <a:prstDash val="solid"/>
           </a:ln>
         </p:spPr>
+        <p:txBody>
+          <a:bodyPr/>
+          <a:p/>
+        </p:txBody>
       </p:sp>
       <p:sp>
         <p:nvSpPr>
@@ -14545,6 +15777,10 @@
           </a:solidFill>
           <a:ln/>
         </p:spPr>
+        <p:txBody>
+          <a:bodyPr/>
+          <a:p/>
+        </p:txBody>
       </p:sp>
       <p:sp>
         <p:nvSpPr>
@@ -14643,6 +15879,10 @@
           </a:solidFill>
           <a:ln/>
         </p:spPr>
+        <p:txBody>
+          <a:bodyPr/>
+          <a:p/>
+        </p:txBody>
       </p:sp>
       <p:sp>
         <p:nvSpPr>
@@ -14663,6 +15903,10 @@
           </a:solidFill>
           <a:ln/>
         </p:spPr>
+        <p:txBody>
+          <a:bodyPr/>
+          <a:p/>
+        </p:txBody>
       </p:sp>
       <p:sp>
         <p:nvSpPr>
@@ -14764,6 +16008,10 @@
           </a:solidFill>
           <a:ln/>
         </p:spPr>
+        <p:txBody>
+          <a:bodyPr/>
+          <a:p/>
+        </p:txBody>
       </p:sp>
       <p:sp>
         <p:nvSpPr>
@@ -14784,6 +16032,10 @@
           </a:solidFill>
           <a:ln/>
         </p:spPr>
+        <p:txBody>
+          <a:bodyPr/>
+          <a:p/>
+        </p:txBody>
       </p:sp>
       <p:sp>
         <p:nvSpPr>
@@ -14885,6 +16137,10 @@
           </a:solidFill>
           <a:ln/>
         </p:spPr>
+        <p:txBody>
+          <a:bodyPr/>
+          <a:p/>
+        </p:txBody>
       </p:sp>
       <p:sp>
         <p:nvSpPr>
@@ -14905,6 +16161,10 @@
           </a:solidFill>
           <a:ln/>
         </p:spPr>
+        <p:txBody>
+          <a:bodyPr/>
+          <a:p/>
+        </p:txBody>
       </p:sp>
       <p:sp>
         <p:nvSpPr>
@@ -15006,6 +16266,10 @@
           </a:solidFill>
           <a:ln/>
         </p:spPr>
+        <p:txBody>
+          <a:bodyPr/>
+          <a:p/>
+        </p:txBody>
       </p:sp>
       <p:sp>
         <p:nvSpPr>
@@ -15026,6 +16290,10 @@
           </a:solidFill>
           <a:ln/>
         </p:spPr>
+        <p:txBody>
+          <a:bodyPr/>
+          <a:p/>
+        </p:txBody>
       </p:sp>
       <p:sp>
         <p:nvSpPr>
@@ -15244,6 +16512,10 @@
             <a:prstDash val="solid"/>
           </a:ln>
         </p:spPr>
+        <p:txBody>
+          <a:bodyPr/>
+          <a:p/>
+        </p:txBody>
       </p:sp>
       <p:sp>
         <p:nvSpPr>
@@ -15264,6 +16536,10 @@
           </a:solidFill>
           <a:ln/>
         </p:spPr>
+        <p:txBody>
+          <a:bodyPr/>
+          <a:p/>
+        </p:txBody>
       </p:sp>
       <p:sp>
         <p:nvSpPr>
@@ -15411,6 +16687,10 @@
             <a:prstDash val="solid"/>
           </a:ln>
         </p:spPr>
+        <p:txBody>
+          <a:bodyPr/>
+          <a:p/>
+        </p:txBody>
       </p:sp>
       <p:sp>
         <p:nvSpPr>
@@ -15431,6 +16711,10 @@
           </a:solidFill>
           <a:ln/>
         </p:spPr>
+        <p:txBody>
+          <a:bodyPr/>
+          <a:p/>
+        </p:txBody>
       </p:sp>
       <p:sp>
         <p:nvSpPr>
@@ -15578,6 +16862,10 @@
             <a:prstDash val="solid"/>
           </a:ln>
         </p:spPr>
+        <p:txBody>
+          <a:bodyPr/>
+          <a:p/>
+        </p:txBody>
       </p:sp>
       <p:sp>
         <p:nvSpPr>
@@ -15598,6 +16886,10 @@
           </a:solidFill>
           <a:ln/>
         </p:spPr>
+        <p:txBody>
+          <a:bodyPr/>
+          <a:p/>
+        </p:txBody>
       </p:sp>
       <p:sp>
         <p:nvSpPr>
@@ -15745,6 +17037,10 @@
             <a:prstDash val="solid"/>
           </a:ln>
         </p:spPr>
+        <p:txBody>
+          <a:bodyPr/>
+          <a:p/>
+        </p:txBody>
       </p:sp>
       <p:sp>
         <p:nvSpPr>
@@ -15765,6 +17061,10 @@
           </a:solidFill>
           <a:ln/>
         </p:spPr>
+        <p:txBody>
+          <a:bodyPr/>
+          <a:p/>
+        </p:txBody>
       </p:sp>
       <p:sp>
         <p:nvSpPr>
@@ -15912,6 +17212,10 @@
             <a:prstDash val="solid"/>
           </a:ln>
         </p:spPr>
+        <p:txBody>
+          <a:bodyPr/>
+          <a:p/>
+        </p:txBody>
       </p:sp>
       <p:sp>
         <p:nvSpPr>
@@ -15932,6 +17236,10 @@
           </a:solidFill>
           <a:ln/>
         </p:spPr>
+        <p:txBody>
+          <a:bodyPr/>
+          <a:p/>
+        </p:txBody>
       </p:sp>
       <p:sp>
         <p:nvSpPr>
@@ -16079,6 +17387,10 @@
             <a:prstDash val="solid"/>
           </a:ln>
         </p:spPr>
+        <p:txBody>
+          <a:bodyPr/>
+          <a:p/>
+        </p:txBody>
       </p:sp>
       <p:sp>
         <p:nvSpPr>
@@ -16099,6 +17411,10 @@
           </a:solidFill>
           <a:ln/>
         </p:spPr>
+        <p:txBody>
+          <a:bodyPr/>
+          <a:p/>
+        </p:txBody>
       </p:sp>
       <p:sp>
         <p:nvSpPr>

--- a/docs/Trazo-Presentacion.pptx
+++ b/docs/Trazo-Presentacion.pptx
@@ -1220,7 +1220,7 @@
           <a:p>
             <a:r>
               <a:rPr lang="en-US" dirty="0"/>
-              <a:t>No os voy a decir que la competencia es mala. NeuronUP es el referente y hace bien muchas cosas. Pero la empresa que hoy es nuestro cliente ancla, con cinco centros, lo dejó por dos razones muy concretas: les salía caro y se les hacía cuesta arriba en el día a día. Justo ahí queremos estar: más ágil de manejar y más asequible, sin bajar el rigor ni un milímetro.</a:t>
+              <a:t>No os voy a decir que las plataformas de referencia del sector sean malas: hacen bien muchas cosas. Pero muchos centros las dejan por dos razones muy concretas: les salen caras y se les hacen cuesta arriba en el día a día. Justo ahí queremos estar: más ágil de manejar y más asequible, sin bajar el rigor ni un milímetro.</a:t>
             </a:r>
             <a:endParaRPr lang="en-US" dirty="0"/>
           </a:p>
@@ -4539,7 +4539,7 @@
                 <a:ea typeface="Century Gothic" pitchFamily="34" charset="-122"/>
                 <a:cs typeface="Century Gothic" pitchFamily="34" charset="-120"/>
               </a:rPr>
-              <a:t>Las tijeras, el boli rojo y diez personas a la vez</a:t>
+              <a:t>El día a día del centro pesa</a:t>
             </a:r>
             <a:endParaRPr lang="en-US" sz="3400" dirty="0"/>
           </a:p>
@@ -4932,7 +4932,7 @@
                 <a:ea typeface="Century Gothic" pitchFamily="34" charset="-122"/>
                 <a:cs typeface="Century Gothic" pitchFamily="34" charset="-120"/>
               </a:rPr>
-              <a:t>Por qué Laura dejó NeuronUP</a:t>
+              <a:t>Ágil y asequible frente al referente</a:t>
             </a:r>
             <a:endParaRPr lang="en-US" sz="3400" dirty="0"/>
           </a:p>
